--- a/docs/pitch_deck/ChengetAI-Pitch-Deck.pptx
+++ b/docs/pitch_deck/ChengetAI-Pitch-Deck.pptx
@@ -1945,7 +1945,7 @@
       </p:grpSpPr>
       <p:pic>
         <p:nvPicPr>
-          <p:cNvPr id="2" name="Image 0" descr="/home/user/ChengetAi/docs/assets/logo-mark.png">    </p:cNvPr>
+          <p:cNvPr id="2" name="Image 0" descr="/Users/Lester/Documents/GitHub/ChengetAi/docs/assets/logo-mark.png">    </p:cNvPr>
           <p:cNvPicPr>
             <a:picLocks noChangeAspect="1"/>
           </p:cNvPicPr>
@@ -2541,7 +2541,7 @@
                 <a:ea typeface="Arial" pitchFamily="34" charset="-122"/>
                 <a:cs typeface="Arial" pitchFamily="34" charset="-120"/>
               </a:rPr>
-              <a:t>73</a:t>
+              <a:t>94</a:t>
             </a:r>
             <a:endParaRPr lang="en-US" sz="4400" dirty="0"/>
           </a:p>
@@ -5856,7 +5856,7 @@
         <p:spPr>
           <a:xfrm>
             <a:off x="566928" y="5120640"/>
-            <a:ext cx="5120640" cy="274320"/>
+            <a:ext cx="5669280" cy="274320"/>
           </a:xfrm>
           <a:prstGeom prst="rect">
             <a:avLst/>
@@ -5880,7 +5880,7 @@
                 <a:ea typeface="Calibri" pitchFamily="34" charset="-122"/>
                 <a:cs typeface="Calibri" pitchFamily="34" charset="-120"/>
               </a:rPr>
-              <a:t>Product, backend and AI engineering, architecture, compliance</a:t>
+              <a:t>Sole developer — product, backend and AI engineering, architecture, Flutter + web UI, compliance</a:t>
             </a:r>
             <a:endParaRPr lang="en-US" sz="1200" dirty="0"/>
           </a:p>
@@ -5889,45 +5889,6 @@
       <p:sp>
         <p:nvSpPr>
           <p:cNvPr id="23" name="Text 21"/>
-          <p:cNvSpPr txBox="1"/>
-          <p:nvPr/>
-        </p:nvSpPr>
-        <p:spPr>
-          <a:xfrm>
-            <a:off x="566928" y="5413248"/>
-            <a:ext cx="5669280" cy="274320"/>
-          </a:xfrm>
-          <a:prstGeom prst="rect">
-            <a:avLst/>
-          </a:prstGeom>
-          <a:noFill/>
-          <a:ln/>
-        </p:spPr>
-        <p:txBody>
-          <a:bodyPr wrap="square" lIns="0" tIns="0" rIns="0" bIns="0" rtlCol="0" anchor="ctr"/>
-          <a:lstStyle/>
-          <a:p>
-            <a:pPr indent="0" marL="0">
-              <a:buNone/>
-            </a:pPr>
-            <a:r>
-              <a:rPr lang="en-US" sz="1150" i="1" dirty="0">
-                <a:solidFill>
-                  <a:srgbClr val="8FB5AC"/>
-                </a:solidFill>
-                <a:latin typeface="Calibri" pitchFamily="34" charset="0"/>
-                <a:ea typeface="Calibri" pitchFamily="34" charset="-122"/>
-                <a:cs typeface="Calibri" pitchFamily="34" charset="-120"/>
-              </a:rPr>
-              <a:t>Frontend contribution: Agnes Goora (Flutter and web UI)</a:t>
-            </a:r>
-            <a:endParaRPr lang="en-US" sz="1150" dirty="0"/>
-          </a:p>
-        </p:txBody>
-      </p:sp>
-      <p:sp>
-        <p:nvSpPr>
-          <p:cNvPr id="24" name="Text 22"/>
           <p:cNvSpPr txBox="1"/>
           <p:nvPr/>
         </p:nvSpPr>
@@ -5966,7 +5927,7 @@
       </p:sp>
       <p:sp>
         <p:nvSpPr>
-          <p:cNvPr id="25" name="Text 23"/>
+          <p:cNvPr id="24" name="Text 22"/>
           <p:cNvSpPr txBox="1"/>
           <p:nvPr/>
         </p:nvSpPr>
@@ -9222,7 +9183,7 @@
       </p:sp>
       <p:pic>
         <p:nvPicPr>
-          <p:cNvPr id="4" name="Image 0" descr="/home/user/ChengetAi/docs/screenshots/admin-overview.png">    </p:cNvPr>
+          <p:cNvPr id="4" name="Image 0" descr="/Users/Lester/Documents/GitHub/ChengetAi/docs/screenshots/admin-overview.png">    </p:cNvPr>
           <p:cNvPicPr>
             <a:picLocks noChangeAspect="1"/>
           </p:cNvPicPr>

--- a/docs/pitch_deck/ChengetAI-Pitch-Deck.pptx
+++ b/docs/pitch_deck/ChengetAI-Pitch-Deck.pptx
@@ -18,9 +18,10 @@
     <p:sldId id="266" r:id="rId12"/>
     <p:sldId id="267" r:id="rId13"/>
     <p:sldId id="268" r:id="rId14"/>
+    <p:sldId id="269" r:id="rId15"/>
   </p:sldIdLst>
   <p:notesMasterIdLst>
-    <p:notesMasterId r:id="rId15"/>
+    <p:notesMasterId r:id="rId16"/>
   </p:notesMasterIdLst>
   <p:sldSz cx="12192000" cy="6858000"/>
   <p:notesSz cx="6858000" cy="12192000"/>
@@ -690,7 +691,7 @@
           <a:p>
             <a:r>
               <a:rPr lang="en-US" dirty="0"/>
-              <a:t>The code is market-agnostic; partnerships, support-contact verification and language coverage are not. That is why the plan sequences markets instead of claiming seven at launch.</a:t>
+              <a:t/>
             </a:r>
             <a:endParaRPr lang="en-US" dirty="0"/>
           </a:p>
@@ -778,7 +779,7 @@
           <a:p>
             <a:r>
               <a:rPr lang="en-US" dirty="0"/>
-              <a:t>A reviewer will find these anyway. Naming them first is both more useful and more credible than a checklist of unqualified yeses — and it is the same posture the product takes with users when a support contact is unverified.</a:t>
+              <a:t>The code is market-agnostic; partnerships, support-contact verification and language coverage are not. That is why the plan sequences markets instead of claiming seven at launch.</a:t>
             </a:r>
             <a:endParaRPr lang="en-US" dirty="0"/>
           </a:p>
@@ -866,7 +867,7 @@
           <a:p>
             <a:r>
               <a:rPr lang="en-US" dirty="0"/>
-              <a:t>Close on the first line: people can only act on information they can trust. That is the OSF framing, and it is what this product does in three concrete steps.</a:t>
+              <a:t>A reviewer will find these anyway. Naming them first is both more useful and more credible than a checklist of unqualified yeses — and it is the same posture the product takes with users when a support contact is unverified.</a:t>
             </a:r>
             <a:endParaRPr lang="en-US" dirty="0"/>
           </a:p>
@@ -890,6 +891,94 @@
             <a:fld id="{F7021451-1387-4CA6-816F-3879F97B5CBC}" type="slidenum">
               <a:rPr lang="en-US"/>
               <a:t>13</a:t>
+            </a:fld>
+            <a:endParaRPr lang="en-US"/>
+          </a:p>
+        </p:txBody>
+      </p:sp>
+    </p:spTree>
+    <p:extLst>
+      <p:ext uri="{BB962C8B-B14F-4D97-AF65-F5344CB8AC3E}">
+        <p14:creationId xmlns:p14="http://schemas.microsoft.com/office/powerpoint/2010/main" val="1024086991"/>
+      </p:ext>
+    </p:extLst>
+  </p:cSld>
+  <p:clrMapOvr>
+    <a:masterClrMapping/>
+  </p:clrMapOvr>
+</p:notes>
+</file>
+
+<file path=ppt/notesSlides/notesSlide14.xml><?xml version="1.0" encoding="utf-8"?>
+<p:notes xmlns:a="http://schemas.openxmlformats.org/drawingml/2006/main" xmlns:r="http://schemas.openxmlformats.org/officeDocument/2006/relationships" xmlns:p="http://schemas.openxmlformats.org/presentationml/2006/main">
+  <p:cSld>
+    <p:spTree>
+      <p:nvGrpSpPr>
+        <p:cNvPr id="1" name=""/>
+        <p:cNvGrpSpPr/>
+        <p:nvPr/>
+      </p:nvGrpSpPr>
+      <p:grpSpPr>
+        <a:xfrm>
+          <a:off x="0" y="0"/>
+          <a:ext cx="0" cy="0"/>
+          <a:chOff x="0" y="0"/>
+          <a:chExt cx="0" cy="0"/>
+        </a:xfrm>
+      </p:grpSpPr>
+      <p:sp>
+        <p:nvSpPr>
+          <p:cNvPr id="2" name="Slide Image Placeholder 1"/>
+          <p:cNvSpPr>
+            <a:spLocks noGrp="1" noRot="1" noChangeAspect="1"/>
+          </p:cNvSpPr>
+          <p:nvPr>
+            <p:ph type="sldImg"/>
+          </p:nvPr>
+        </p:nvSpPr>
+        <p:spPr/>
+      </p:sp>
+      <p:sp>
+        <p:nvSpPr>
+          <p:cNvPr id="3" name="Notes Placeholder 2"/>
+          <p:cNvSpPr>
+            <a:spLocks noGrp="1"/>
+          </p:cNvSpPr>
+          <p:nvPr>
+            <p:ph type="body" idx="1"/>
+          </p:nvPr>
+        </p:nvSpPr>
+        <p:spPr/>
+        <p:txBody>
+          <a:bodyPr/>
+          <a:lstStyle/>
+          <a:p>
+            <a:r>
+              <a:rPr lang="en-US" dirty="0"/>
+              <a:t>Close on the first line: people can only act on information they can trust. That is the OSF framing, and it is what this product does in three concrete steps.</a:t>
+            </a:r>
+            <a:endParaRPr lang="en-US" dirty="0"/>
+          </a:p>
+        </p:txBody>
+      </p:sp>
+      <p:sp>
+        <p:nvSpPr>
+          <p:cNvPr id="4" name="Slide Number Placeholder 3"/>
+          <p:cNvSpPr>
+            <a:spLocks noGrp="1"/>
+          </p:cNvSpPr>
+          <p:nvPr>
+            <p:ph type="sldNum" sz="quarter" idx="10"/>
+          </p:nvPr>
+        </p:nvSpPr>
+        <p:spPr/>
+        <p:txBody>
+          <a:bodyPr/>
+          <a:lstStyle/>
+          <a:p>
+            <a:fld id="{F7021451-1387-4CA6-816F-3879F97B5CBC}" type="slidenum">
+              <a:rPr lang="en-US"/>
+              <a:t>14</a:t>
             </a:fld>
             <a:endParaRPr lang="en-US"/>
           </a:p>
@@ -1306,7 +1395,7 @@
           <a:p>
             <a:r>
               <a:rPr lang="en-US" dirty="0"/>
-              <a:t/>
+              <a:t>The newest surface and the one that changes the product's posture: everything else waits for the user to ask. Worth saying out loud that the screening is native Android rather than Flutter, and that iOS cannot do this — the honesty lands better than a roadmap promise.</a:t>
             </a:r>
             <a:endParaRPr lang="en-US" dirty="0"/>
           </a:p>
@@ -1482,7 +1571,7 @@
           <a:p>
             <a:r>
               <a:rPr lang="en-US" dirty="0"/>
-              <a:t>The support-registry decision is the one to dwell on in questions: it is the clearest case where the responsible choice was to not use the model.</a:t>
+              <a:t/>
             </a:r>
             <a:endParaRPr lang="en-US" dirty="0"/>
           </a:p>
@@ -1570,7 +1659,7 @@
           <a:p>
             <a:r>
               <a:rPr lang="en-US" dirty="0"/>
-              <a:t/>
+              <a:t>The support-registry decision is the one to dwell on in questions: it is the clearest case where the responsible choice was to not use the model.</a:t>
             </a:r>
             <a:endParaRPr lang="en-US" dirty="0"/>
           </a:p>
@@ -1945,7 +2034,7 @@
       </p:grpSpPr>
       <p:pic>
         <p:nvPicPr>
-          <p:cNvPr id="2" name="Image 0" descr="/Users/Lester/Documents/GitHub/ChengetAi/docs/assets/logo-mark.png">    </p:cNvPr>
+          <p:cNvPr id="2" name="Image 0" descr="/home/user/ChengetAi/docs/assets/logo-mark.png">    </p:cNvPr>
           <p:cNvPicPr>
             <a:picLocks noChangeAspect="1"/>
           </p:cNvPicPr>
@@ -2234,6 +2323,899 @@
 <file path=ppt/slides/slide10.xml><?xml version="1.0" encoding="utf-8"?>
 <p:sld xmlns:a="http://schemas.openxmlformats.org/drawingml/2006/main" xmlns:r="http://schemas.openxmlformats.org/officeDocument/2006/relationships" xmlns:p="http://schemas.openxmlformats.org/presentationml/2006/main">
   <p:cSld name="Slide 10">
+    <p:bg>
+      <p:bgPr>
+        <a:solidFill>
+          <a:srgbClr val="F4FAF8"/>
+        </a:solidFill>
+      </p:bgPr>
+    </p:bg>
+    <p:spTree>
+      <p:nvGrpSpPr>
+        <p:cNvPr id="1" name=""/>
+        <p:cNvGrpSpPr/>
+        <p:nvPr/>
+      </p:nvGrpSpPr>
+      <p:grpSpPr>
+        <a:xfrm>
+          <a:off x="0" y="0"/>
+          <a:ext cx="0" cy="0"/>
+          <a:chOff x="0" y="0"/>
+          <a:chExt cx="0" cy="0"/>
+        </a:xfrm>
+      </p:grpSpPr>
+      <p:sp>
+        <p:nvSpPr>
+          <p:cNvPr id="2" name="Text 0"/>
+          <p:cNvSpPr txBox="1"/>
+          <p:nvPr/>
+        </p:nvSpPr>
+        <p:spPr>
+          <a:xfrm>
+            <a:off x="566928" y="457200"/>
+            <a:ext cx="11027664" cy="256032"/>
+          </a:xfrm>
+          <a:prstGeom prst="rect">
+            <a:avLst/>
+          </a:prstGeom>
+          <a:noFill/>
+          <a:ln/>
+        </p:spPr>
+        <p:txBody>
+          <a:bodyPr wrap="square" lIns="0" tIns="0" rIns="0" bIns="0" rtlCol="0" anchor="ctr"/>
+          <a:lstStyle/>
+          <a:p>
+            <a:pPr indent="0" marL="0">
+              <a:buNone/>
+            </a:pPr>
+            <a:r>
+              <a:rPr lang="en-US" sz="1200" b="1" spc="140" kern="0" dirty="0">
+                <a:solidFill>
+                  <a:srgbClr val="14A085"/>
+                </a:solidFill>
+                <a:latin typeface="Arial" pitchFamily="34" charset="0"/>
+                <a:ea typeface="Arial" pitchFamily="34" charset="-122"/>
+                <a:cs typeface="Arial" pitchFamily="34" charset="-120"/>
+              </a:rPr>
+              <a:t>COVERAGE</a:t>
+            </a:r>
+            <a:endParaRPr lang="en-US" sz="1200" dirty="0"/>
+          </a:p>
+        </p:txBody>
+      </p:sp>
+      <p:sp>
+        <p:nvSpPr>
+          <p:cNvPr id="3" name="Text 1"/>
+          <p:cNvSpPr txBox="1"/>
+          <p:nvPr/>
+        </p:nvSpPr>
+        <p:spPr>
+          <a:xfrm>
+            <a:off x="566928" y="749808"/>
+            <a:ext cx="11027664" cy="914400"/>
+          </a:xfrm>
+          <a:prstGeom prst="rect">
+            <a:avLst/>
+          </a:prstGeom>
+          <a:noFill/>
+          <a:ln/>
+        </p:spPr>
+        <p:txBody>
+          <a:bodyPr wrap="square" lIns="0" tIns="0" rIns="0" bIns="0" rtlCol="0" anchor="ctr"/>
+          <a:lstStyle/>
+          <a:p>
+            <a:pPr indent="0" marL="0">
+              <a:buNone/>
+            </a:pPr>
+            <a:r>
+              <a:rPr lang="en-US" sz="3200" b="1" dirty="0">
+                <a:solidFill>
+                  <a:srgbClr val="0F172A"/>
+                </a:solidFill>
+                <a:latin typeface="Arial" pitchFamily="34" charset="0"/>
+                <a:ea typeface="Arial" pitchFamily="34" charset="-122"/>
+                <a:cs typeface="Arial" pitchFamily="34" charset="-120"/>
+              </a:rPr>
+              <a:t>One codebase, 7 markets.</a:t>
+            </a:r>
+            <a:endParaRPr lang="en-US" sz="3200" dirty="0"/>
+          </a:p>
+        </p:txBody>
+      </p:sp>
+      <p:sp>
+        <p:nvSpPr>
+          <p:cNvPr id="4" name="Shape 2"/>
+          <p:cNvSpPr/>
+          <p:nvPr/>
+        </p:nvSpPr>
+        <p:spPr>
+          <a:xfrm>
+            <a:off x="566928" y="1792224"/>
+            <a:ext cx="1430122" cy="512064"/>
+          </a:xfrm>
+          <a:prstGeom prst="roundRect">
+            <a:avLst>
+              <a:gd name="adj" fmla="val 50000"/>
+            </a:avLst>
+          </a:prstGeom>
+          <a:solidFill>
+            <a:srgbClr val="FFFFFF"/>
+          </a:solidFill>
+          <a:ln w="12700">
+            <a:solidFill>
+              <a:srgbClr val="D6E7E2"/>
+            </a:solidFill>
+            <a:prstDash val="solid"/>
+          </a:ln>
+        </p:spPr>
+      </p:sp>
+      <p:sp>
+        <p:nvSpPr>
+          <p:cNvPr id="5" name="Text 3"/>
+          <p:cNvSpPr txBox="1"/>
+          <p:nvPr/>
+        </p:nvSpPr>
+        <p:spPr>
+          <a:xfrm>
+            <a:off x="566928" y="1792224"/>
+            <a:ext cx="1430122" cy="512064"/>
+          </a:xfrm>
+          <a:prstGeom prst="rect">
+            <a:avLst/>
+          </a:prstGeom>
+          <a:noFill/>
+          <a:ln/>
+        </p:spPr>
+        <p:txBody>
+          <a:bodyPr wrap="square" lIns="0" tIns="0" rIns="0" bIns="0" rtlCol="0" anchor="ctr"/>
+          <a:lstStyle/>
+          <a:p>
+            <a:pPr algn="ctr" indent="0" marL="0">
+              <a:buNone/>
+            </a:pPr>
+            <a:r>
+              <a:rPr lang="en-US" sz="1350" b="1" dirty="0">
+                <a:solidFill>
+                  <a:srgbClr val="0F6B5C"/>
+                </a:solidFill>
+                <a:latin typeface="Arial" pitchFamily="34" charset="0"/>
+                <a:ea typeface="Arial" pitchFamily="34" charset="-122"/>
+                <a:cs typeface="Arial" pitchFamily="34" charset="-120"/>
+              </a:rPr>
+              <a:t>Zimbabwe</a:t>
+            </a:r>
+            <a:endParaRPr lang="en-US" sz="1350" dirty="0"/>
+          </a:p>
+        </p:txBody>
+      </p:sp>
+      <p:sp>
+        <p:nvSpPr>
+          <p:cNvPr id="6" name="Shape 4"/>
+          <p:cNvSpPr/>
+          <p:nvPr/>
+        </p:nvSpPr>
+        <p:spPr>
+          <a:xfrm>
+            <a:off x="2143354" y="1792224"/>
+            <a:ext cx="1106424" cy="512064"/>
+          </a:xfrm>
+          <a:prstGeom prst="roundRect">
+            <a:avLst>
+              <a:gd name="adj" fmla="val 50000"/>
+            </a:avLst>
+          </a:prstGeom>
+          <a:solidFill>
+            <a:srgbClr val="FFFFFF"/>
+          </a:solidFill>
+          <a:ln w="12700">
+            <a:solidFill>
+              <a:srgbClr val="D6E7E2"/>
+            </a:solidFill>
+            <a:prstDash val="solid"/>
+          </a:ln>
+        </p:spPr>
+      </p:sp>
+      <p:sp>
+        <p:nvSpPr>
+          <p:cNvPr id="7" name="Text 5"/>
+          <p:cNvSpPr txBox="1"/>
+          <p:nvPr/>
+        </p:nvSpPr>
+        <p:spPr>
+          <a:xfrm>
+            <a:off x="2143354" y="1792224"/>
+            <a:ext cx="1106424" cy="512064"/>
+          </a:xfrm>
+          <a:prstGeom prst="rect">
+            <a:avLst/>
+          </a:prstGeom>
+          <a:noFill/>
+          <a:ln/>
+        </p:spPr>
+        <p:txBody>
+          <a:bodyPr wrap="square" lIns="0" tIns="0" rIns="0" bIns="0" rtlCol="0" anchor="ctr"/>
+          <a:lstStyle/>
+          <a:p>
+            <a:pPr algn="ctr" indent="0" marL="0">
+              <a:buNone/>
+            </a:pPr>
+            <a:r>
+              <a:rPr lang="en-US" sz="1350" b="1" dirty="0">
+                <a:solidFill>
+                  <a:srgbClr val="0F6B5C"/>
+                </a:solidFill>
+                <a:latin typeface="Arial" pitchFamily="34" charset="0"/>
+                <a:ea typeface="Arial" pitchFamily="34" charset="-122"/>
+                <a:cs typeface="Arial" pitchFamily="34" charset="-120"/>
+              </a:rPr>
+              <a:t>Kenya</a:t>
+            </a:r>
+            <a:endParaRPr lang="en-US" sz="1350" dirty="0"/>
+          </a:p>
+        </p:txBody>
+      </p:sp>
+      <p:sp>
+        <p:nvSpPr>
+          <p:cNvPr id="8" name="Shape 6"/>
+          <p:cNvSpPr/>
+          <p:nvPr/>
+        </p:nvSpPr>
+        <p:spPr>
+          <a:xfrm>
+            <a:off x="3396082" y="1792224"/>
+            <a:ext cx="1322222" cy="512064"/>
+          </a:xfrm>
+          <a:prstGeom prst="roundRect">
+            <a:avLst>
+              <a:gd name="adj" fmla="val 50000"/>
+            </a:avLst>
+          </a:prstGeom>
+          <a:solidFill>
+            <a:srgbClr val="FFFFFF"/>
+          </a:solidFill>
+          <a:ln w="12700">
+            <a:solidFill>
+              <a:srgbClr val="D6E7E2"/>
+            </a:solidFill>
+            <a:prstDash val="solid"/>
+          </a:ln>
+        </p:spPr>
+      </p:sp>
+      <p:sp>
+        <p:nvSpPr>
+          <p:cNvPr id="9" name="Text 7"/>
+          <p:cNvSpPr txBox="1"/>
+          <p:nvPr/>
+        </p:nvSpPr>
+        <p:spPr>
+          <a:xfrm>
+            <a:off x="3396082" y="1792224"/>
+            <a:ext cx="1322222" cy="512064"/>
+          </a:xfrm>
+          <a:prstGeom prst="rect">
+            <a:avLst/>
+          </a:prstGeom>
+          <a:noFill/>
+          <a:ln/>
+        </p:spPr>
+        <p:txBody>
+          <a:bodyPr wrap="square" lIns="0" tIns="0" rIns="0" bIns="0" rtlCol="0" anchor="ctr"/>
+          <a:lstStyle/>
+          <a:p>
+            <a:pPr algn="ctr" indent="0" marL="0">
+              <a:buNone/>
+            </a:pPr>
+            <a:r>
+              <a:rPr lang="en-US" sz="1350" b="1" dirty="0">
+                <a:solidFill>
+                  <a:srgbClr val="0F6B5C"/>
+                </a:solidFill>
+                <a:latin typeface="Arial" pitchFamily="34" charset="0"/>
+                <a:ea typeface="Arial" pitchFamily="34" charset="-122"/>
+                <a:cs typeface="Arial" pitchFamily="34" charset="-120"/>
+              </a:rPr>
+              <a:t>Nigeria</a:t>
+            </a:r>
+            <a:endParaRPr lang="en-US" sz="1350" dirty="0"/>
+          </a:p>
+        </p:txBody>
+      </p:sp>
+      <p:sp>
+        <p:nvSpPr>
+          <p:cNvPr id="10" name="Shape 8"/>
+          <p:cNvSpPr/>
+          <p:nvPr/>
+        </p:nvSpPr>
+        <p:spPr>
+          <a:xfrm>
+            <a:off x="4864608" y="1792224"/>
+            <a:ext cx="1214323" cy="512064"/>
+          </a:xfrm>
+          <a:prstGeom prst="roundRect">
+            <a:avLst>
+              <a:gd name="adj" fmla="val 50000"/>
+            </a:avLst>
+          </a:prstGeom>
+          <a:solidFill>
+            <a:srgbClr val="FFFFFF"/>
+          </a:solidFill>
+          <a:ln w="12700">
+            <a:solidFill>
+              <a:srgbClr val="D6E7E2"/>
+            </a:solidFill>
+            <a:prstDash val="solid"/>
+          </a:ln>
+        </p:spPr>
+      </p:sp>
+      <p:sp>
+        <p:nvSpPr>
+          <p:cNvPr id="11" name="Text 9"/>
+          <p:cNvSpPr txBox="1"/>
+          <p:nvPr/>
+        </p:nvSpPr>
+        <p:spPr>
+          <a:xfrm>
+            <a:off x="4864608" y="1792224"/>
+            <a:ext cx="1214323" cy="512064"/>
+          </a:xfrm>
+          <a:prstGeom prst="rect">
+            <a:avLst/>
+          </a:prstGeom>
+          <a:noFill/>
+          <a:ln/>
+        </p:spPr>
+        <p:txBody>
+          <a:bodyPr wrap="square" lIns="0" tIns="0" rIns="0" bIns="0" rtlCol="0" anchor="ctr"/>
+          <a:lstStyle/>
+          <a:p>
+            <a:pPr algn="ctr" indent="0" marL="0">
+              <a:buNone/>
+            </a:pPr>
+            <a:r>
+              <a:rPr lang="en-US" sz="1350" b="1" dirty="0">
+                <a:solidFill>
+                  <a:srgbClr val="0F6B5C"/>
+                </a:solidFill>
+                <a:latin typeface="Arial" pitchFamily="34" charset="0"/>
+                <a:ea typeface="Arial" pitchFamily="34" charset="-122"/>
+                <a:cs typeface="Arial" pitchFamily="34" charset="-120"/>
+              </a:rPr>
+              <a:t>Uganda</a:t>
+            </a:r>
+            <a:endParaRPr lang="en-US" sz="1350" dirty="0"/>
+          </a:p>
+        </p:txBody>
+      </p:sp>
+      <p:sp>
+        <p:nvSpPr>
+          <p:cNvPr id="12" name="Shape 10"/>
+          <p:cNvSpPr/>
+          <p:nvPr/>
+        </p:nvSpPr>
+        <p:spPr>
+          <a:xfrm>
+            <a:off x="6225235" y="1792224"/>
+            <a:ext cx="1861718" cy="512064"/>
+          </a:xfrm>
+          <a:prstGeom prst="roundRect">
+            <a:avLst>
+              <a:gd name="adj" fmla="val 50000"/>
+            </a:avLst>
+          </a:prstGeom>
+          <a:solidFill>
+            <a:srgbClr val="FFFFFF"/>
+          </a:solidFill>
+          <a:ln w="12700">
+            <a:solidFill>
+              <a:srgbClr val="D6E7E2"/>
+            </a:solidFill>
+            <a:prstDash val="solid"/>
+          </a:ln>
+        </p:spPr>
+      </p:sp>
+      <p:sp>
+        <p:nvSpPr>
+          <p:cNvPr id="13" name="Text 11"/>
+          <p:cNvSpPr txBox="1"/>
+          <p:nvPr/>
+        </p:nvSpPr>
+        <p:spPr>
+          <a:xfrm>
+            <a:off x="6225235" y="1792224"/>
+            <a:ext cx="1861718" cy="512064"/>
+          </a:xfrm>
+          <a:prstGeom prst="rect">
+            <a:avLst/>
+          </a:prstGeom>
+          <a:noFill/>
+          <a:ln/>
+        </p:spPr>
+        <p:txBody>
+          <a:bodyPr wrap="square" lIns="0" tIns="0" rIns="0" bIns="0" rtlCol="0" anchor="ctr"/>
+          <a:lstStyle/>
+          <a:p>
+            <a:pPr algn="ctr" indent="0" marL="0">
+              <a:buNone/>
+            </a:pPr>
+            <a:r>
+              <a:rPr lang="en-US" sz="1350" b="1" dirty="0">
+                <a:solidFill>
+                  <a:srgbClr val="0F6B5C"/>
+                </a:solidFill>
+                <a:latin typeface="Arial" pitchFamily="34" charset="0"/>
+                <a:ea typeface="Arial" pitchFamily="34" charset="-122"/>
+                <a:cs typeface="Arial" pitchFamily="34" charset="-120"/>
+              </a:rPr>
+              <a:t>South Africa</a:t>
+            </a:r>
+            <a:endParaRPr lang="en-US" sz="1350" dirty="0"/>
+          </a:p>
+        </p:txBody>
+      </p:sp>
+      <p:sp>
+        <p:nvSpPr>
+          <p:cNvPr id="14" name="Shape 12"/>
+          <p:cNvSpPr/>
+          <p:nvPr/>
+        </p:nvSpPr>
+        <p:spPr>
+          <a:xfrm>
+            <a:off x="8233258" y="1792224"/>
+            <a:ext cx="1106424" cy="512064"/>
+          </a:xfrm>
+          <a:prstGeom prst="roundRect">
+            <a:avLst>
+              <a:gd name="adj" fmla="val 50000"/>
+            </a:avLst>
+          </a:prstGeom>
+          <a:solidFill>
+            <a:srgbClr val="FFFFFF"/>
+          </a:solidFill>
+          <a:ln w="12700">
+            <a:solidFill>
+              <a:srgbClr val="D6E7E2"/>
+            </a:solidFill>
+            <a:prstDash val="solid"/>
+          </a:ln>
+        </p:spPr>
+      </p:sp>
+      <p:sp>
+        <p:nvSpPr>
+          <p:cNvPr id="15" name="Text 13"/>
+          <p:cNvSpPr txBox="1"/>
+          <p:nvPr/>
+        </p:nvSpPr>
+        <p:spPr>
+          <a:xfrm>
+            <a:off x="8233258" y="1792224"/>
+            <a:ext cx="1106424" cy="512064"/>
+          </a:xfrm>
+          <a:prstGeom prst="rect">
+            <a:avLst/>
+          </a:prstGeom>
+          <a:noFill/>
+          <a:ln/>
+        </p:spPr>
+        <p:txBody>
+          <a:bodyPr wrap="square" lIns="0" tIns="0" rIns="0" bIns="0" rtlCol="0" anchor="ctr"/>
+          <a:lstStyle/>
+          <a:p>
+            <a:pPr algn="ctr" indent="0" marL="0">
+              <a:buNone/>
+            </a:pPr>
+            <a:r>
+              <a:rPr lang="en-US" sz="1350" b="1" dirty="0">
+                <a:solidFill>
+                  <a:srgbClr val="0F6B5C"/>
+                </a:solidFill>
+                <a:latin typeface="Arial" pitchFamily="34" charset="0"/>
+                <a:ea typeface="Arial" pitchFamily="34" charset="-122"/>
+                <a:cs typeface="Arial" pitchFamily="34" charset="-120"/>
+              </a:rPr>
+              <a:t>Ghana</a:t>
+            </a:r>
+            <a:endParaRPr lang="en-US" sz="1350" dirty="0"/>
+          </a:p>
+        </p:txBody>
+      </p:sp>
+      <p:sp>
+        <p:nvSpPr>
+          <p:cNvPr id="16" name="Shape 14"/>
+          <p:cNvSpPr/>
+          <p:nvPr/>
+        </p:nvSpPr>
+        <p:spPr>
+          <a:xfrm>
+            <a:off x="9485986" y="1792224"/>
+            <a:ext cx="1430122" cy="512064"/>
+          </a:xfrm>
+          <a:prstGeom prst="roundRect">
+            <a:avLst>
+              <a:gd name="adj" fmla="val 50000"/>
+            </a:avLst>
+          </a:prstGeom>
+          <a:solidFill>
+            <a:srgbClr val="FFFFFF"/>
+          </a:solidFill>
+          <a:ln w="12700">
+            <a:solidFill>
+              <a:srgbClr val="D6E7E2"/>
+            </a:solidFill>
+            <a:prstDash val="solid"/>
+          </a:ln>
+        </p:spPr>
+      </p:sp>
+      <p:sp>
+        <p:nvSpPr>
+          <p:cNvPr id="17" name="Text 15"/>
+          <p:cNvSpPr txBox="1"/>
+          <p:nvPr/>
+        </p:nvSpPr>
+        <p:spPr>
+          <a:xfrm>
+            <a:off x="9485986" y="1792224"/>
+            <a:ext cx="1430122" cy="512064"/>
+          </a:xfrm>
+          <a:prstGeom prst="rect">
+            <a:avLst/>
+          </a:prstGeom>
+          <a:noFill/>
+          <a:ln/>
+        </p:spPr>
+        <p:txBody>
+          <a:bodyPr wrap="square" lIns="0" tIns="0" rIns="0" bIns="0" rtlCol="0" anchor="ctr"/>
+          <a:lstStyle/>
+          <a:p>
+            <a:pPr algn="ctr" indent="0" marL="0">
+              <a:buNone/>
+            </a:pPr>
+            <a:r>
+              <a:rPr lang="en-US" sz="1350" b="1" dirty="0">
+                <a:solidFill>
+                  <a:srgbClr val="0F6B5C"/>
+                </a:solidFill>
+                <a:latin typeface="Arial" pitchFamily="34" charset="0"/>
+                <a:ea typeface="Arial" pitchFamily="34" charset="-122"/>
+                <a:cs typeface="Arial" pitchFamily="34" charset="-120"/>
+              </a:rPr>
+              <a:t>Tanzania</a:t>
+            </a:r>
+            <a:endParaRPr lang="en-US" sz="1350" dirty="0"/>
+          </a:p>
+        </p:txBody>
+      </p:sp>
+      <p:sp>
+        <p:nvSpPr>
+          <p:cNvPr id="18" name="Shape 16"/>
+          <p:cNvSpPr/>
+          <p:nvPr/>
+        </p:nvSpPr>
+        <p:spPr>
+          <a:xfrm>
+            <a:off x="566928" y="2761488"/>
+            <a:ext cx="11027664" cy="969264"/>
+          </a:xfrm>
+          <a:prstGeom prst="roundRect">
+            <a:avLst>
+              <a:gd name="adj" fmla="val 7547"/>
+            </a:avLst>
+          </a:prstGeom>
+          <a:solidFill>
+            <a:srgbClr val="FFFFFF"/>
+          </a:solidFill>
+          <a:ln/>
+          <a:effectLst>
+            <a:outerShdw sx="100000" sy="100000" kx="0" ky="0" algn="bl" rotWithShape="0" blurRad="127000" dist="25400" dir="5400000">
+              <a:srgbClr val="0F172A">
+                <a:alpha val="10000"/>
+              </a:srgbClr>
+            </a:outerShdw>
+          </a:effectLst>
+        </p:spPr>
+      </p:sp>
+      <p:sp>
+        <p:nvSpPr>
+          <p:cNvPr id="19" name="Text 17"/>
+          <p:cNvSpPr txBox="1"/>
+          <p:nvPr/>
+        </p:nvSpPr>
+        <p:spPr>
+          <a:xfrm>
+            <a:off x="877824" y="2889504"/>
+            <a:ext cx="10405872" cy="274320"/>
+          </a:xfrm>
+          <a:prstGeom prst="rect">
+            <a:avLst/>
+          </a:prstGeom>
+          <a:noFill/>
+          <a:ln/>
+        </p:spPr>
+        <p:txBody>
+          <a:bodyPr wrap="square" lIns="0" tIns="0" rIns="0" bIns="0" rtlCol="0" anchor="ctr"/>
+          <a:lstStyle/>
+          <a:p>
+            <a:pPr indent="0" marL="0">
+              <a:buNone/>
+            </a:pPr>
+            <a:r>
+              <a:rPr lang="en-US" sz="1500" b="1" dirty="0">
+                <a:solidFill>
+                  <a:srgbClr val="0F6B5C"/>
+                </a:solidFill>
+                <a:latin typeface="Arial" pitchFamily="34" charset="0"/>
+                <a:ea typeface="Arial" pitchFamily="34" charset="-122"/>
+                <a:cs typeface="Arial" pitchFamily="34" charset="-120"/>
+              </a:rPr>
+              <a:t>Numbers stored in E.164</a:t>
+            </a:r>
+            <a:endParaRPr lang="en-US" sz="1500" dirty="0"/>
+          </a:p>
+        </p:txBody>
+      </p:sp>
+      <p:sp>
+        <p:nvSpPr>
+          <p:cNvPr id="20" name="Text 18"/>
+          <p:cNvSpPr txBox="1"/>
+          <p:nvPr/>
+        </p:nvSpPr>
+        <p:spPr>
+          <a:xfrm>
+            <a:off x="877824" y="3182112"/>
+            <a:ext cx="10405872" cy="457200"/>
+          </a:xfrm>
+          <a:prstGeom prst="rect">
+            <a:avLst/>
+          </a:prstGeom>
+          <a:noFill/>
+          <a:ln/>
+        </p:spPr>
+        <p:txBody>
+          <a:bodyPr wrap="square" lIns="0" tIns="0" rIns="0" bIns="0" rtlCol="0" anchor="ctr"/>
+          <a:lstStyle/>
+          <a:p>
+            <a:pPr indent="0" marL="0">
+              <a:buNone/>
+            </a:pPr>
+            <a:r>
+              <a:rPr lang="en-US" sz="1250" dirty="0">
+                <a:solidFill>
+                  <a:srgbClr val="0F172A"/>
+                </a:solidFill>
+                <a:latin typeface="Calibri" pitchFamily="34" charset="0"/>
+                <a:ea typeface="Calibri" pitchFamily="34" charset="-122"/>
+                <a:cs typeface="Calibri" pitchFamily="34" charset="-120"/>
+              </a:rPr>
+              <a:t>0771234567 is a valid Zimbabwean, Ugandan and Tanzanian number. A national-format key would have silently merged three unrelated people's reputations — invisible in a demo, catastrophic in production.</a:t>
+            </a:r>
+            <a:endParaRPr lang="en-US" sz="1250" dirty="0"/>
+          </a:p>
+        </p:txBody>
+      </p:sp>
+      <p:sp>
+        <p:nvSpPr>
+          <p:cNvPr id="21" name="Shape 19"/>
+          <p:cNvSpPr/>
+          <p:nvPr/>
+        </p:nvSpPr>
+        <p:spPr>
+          <a:xfrm>
+            <a:off x="566928" y="3858768"/>
+            <a:ext cx="11027664" cy="969264"/>
+          </a:xfrm>
+          <a:prstGeom prst="roundRect">
+            <a:avLst>
+              <a:gd name="adj" fmla="val 7547"/>
+            </a:avLst>
+          </a:prstGeom>
+          <a:solidFill>
+            <a:srgbClr val="FFFFFF"/>
+          </a:solidFill>
+          <a:ln/>
+          <a:effectLst>
+            <a:outerShdw sx="100000" sy="100000" kx="0" ky="0" algn="bl" rotWithShape="0" blurRad="127000" dist="25400" dir="5400000">
+              <a:srgbClr val="0F172A">
+                <a:alpha val="10000"/>
+              </a:srgbClr>
+            </a:outerShdw>
+          </a:effectLst>
+        </p:spPr>
+      </p:sp>
+      <p:sp>
+        <p:nvSpPr>
+          <p:cNvPr id="22" name="Text 20"/>
+          <p:cNvSpPr txBox="1"/>
+          <p:nvPr/>
+        </p:nvSpPr>
+        <p:spPr>
+          <a:xfrm>
+            <a:off x="877824" y="3986784"/>
+            <a:ext cx="10405872" cy="274320"/>
+          </a:xfrm>
+          <a:prstGeom prst="rect">
+            <a:avLst/>
+          </a:prstGeom>
+          <a:noFill/>
+          <a:ln/>
+        </p:spPr>
+        <p:txBody>
+          <a:bodyPr wrap="square" lIns="0" tIns="0" rIns="0" bIns="0" rtlCol="0" anchor="ctr"/>
+          <a:lstStyle/>
+          <a:p>
+            <a:pPr indent="0" marL="0">
+              <a:buNone/>
+            </a:pPr>
+            <a:r>
+              <a:rPr lang="en-US" sz="1500" b="1" dirty="0">
+                <a:solidFill>
+                  <a:srgbClr val="0F6B5C"/>
+                </a:solidFill>
+                <a:latin typeface="Arial" pitchFamily="34" charset="0"/>
+                <a:ea typeface="Arial" pitchFamily="34" charset="-122"/>
+                <a:cs typeface="Arial" pitchFamily="34" charset="-120"/>
+              </a:rPr>
+              <a:t>One classifier, localised grounding</a:t>
+            </a:r>
+            <a:endParaRPr lang="en-US" sz="1500" dirty="0"/>
+          </a:p>
+        </p:txBody>
+      </p:sp>
+      <p:sp>
+        <p:nvSpPr>
+          <p:cNvPr id="23" name="Text 21"/>
+          <p:cNvSpPr txBox="1"/>
+          <p:nvPr/>
+        </p:nvSpPr>
+        <p:spPr>
+          <a:xfrm>
+            <a:off x="877824" y="4279392"/>
+            <a:ext cx="10405872" cy="457200"/>
+          </a:xfrm>
+          <a:prstGeom prst="rect">
+            <a:avLst/>
+          </a:prstGeom>
+          <a:noFill/>
+          <a:ln/>
+        </p:spPr>
+        <p:txBody>
+          <a:bodyPr wrap="square" lIns="0" tIns="0" rIns="0" bIns="0" rtlCol="0" anchor="ctr"/>
+          <a:lstStyle/>
+          <a:p>
+            <a:pPr indent="0" marL="0">
+              <a:buNone/>
+            </a:pPr>
+            <a:r>
+              <a:rPr lang="en-US" sz="1250" dirty="0">
+                <a:solidFill>
+                  <a:srgbClr val="0F172A"/>
+                </a:solidFill>
+                <a:latin typeface="Calibri" pitchFamily="34" charset="0"/>
+                <a:ea typeface="Calibri" pitchFamily="34" charset="-122"/>
+                <a:cs typeface="Calibri" pitchFamily="34" charset="-120"/>
+              </a:rPr>
+              <a:t>The mechanism generalises even when the vocabulary doesn't, so one model trained across all markets sees more of each pattern than seven per-country models would.</a:t>
+            </a:r>
+            <a:endParaRPr lang="en-US" sz="1250" dirty="0"/>
+          </a:p>
+        </p:txBody>
+      </p:sp>
+      <p:sp>
+        <p:nvSpPr>
+          <p:cNvPr id="24" name="Shape 22"/>
+          <p:cNvSpPr/>
+          <p:nvPr/>
+        </p:nvSpPr>
+        <p:spPr>
+          <a:xfrm>
+            <a:off x="566928" y="4956048"/>
+            <a:ext cx="11027664" cy="969264"/>
+          </a:xfrm>
+          <a:prstGeom prst="roundRect">
+            <a:avLst>
+              <a:gd name="adj" fmla="val 7547"/>
+            </a:avLst>
+          </a:prstGeom>
+          <a:solidFill>
+            <a:srgbClr val="FFFFFF"/>
+          </a:solidFill>
+          <a:ln/>
+          <a:effectLst>
+            <a:outerShdw sx="100000" sy="100000" kx="0" ky="0" algn="bl" rotWithShape="0" blurRad="127000" dist="25400" dir="5400000">
+              <a:srgbClr val="0F172A">
+                <a:alpha val="10000"/>
+              </a:srgbClr>
+            </a:outerShdw>
+          </a:effectLst>
+        </p:spPr>
+      </p:sp>
+      <p:sp>
+        <p:nvSpPr>
+          <p:cNvPr id="25" name="Text 23"/>
+          <p:cNvSpPr txBox="1"/>
+          <p:nvPr/>
+        </p:nvSpPr>
+        <p:spPr>
+          <a:xfrm>
+            <a:off x="877824" y="5084064"/>
+            <a:ext cx="10405872" cy="274320"/>
+          </a:xfrm>
+          <a:prstGeom prst="rect">
+            <a:avLst/>
+          </a:prstGeom>
+          <a:noFill/>
+          <a:ln/>
+        </p:spPr>
+        <p:txBody>
+          <a:bodyPr wrap="square" lIns="0" tIns="0" rIns="0" bIns="0" rtlCol="0" anchor="ctr"/>
+          <a:lstStyle/>
+          <a:p>
+            <a:pPr indent="0" marL="0">
+              <a:buNone/>
+            </a:pPr>
+            <a:r>
+              <a:rPr lang="en-US" sz="1500" b="1" dirty="0">
+                <a:solidFill>
+                  <a:srgbClr val="0F6B5C"/>
+                </a:solidFill>
+                <a:latin typeface="Arial" pitchFamily="34" charset="0"/>
+                <a:ea typeface="Arial" pitchFamily="34" charset="-122"/>
+                <a:cs typeface="Arial" pitchFamily="34" charset="-120"/>
+              </a:rPr>
+              <a:t>Coarse regions, two hotspot maps</a:t>
+            </a:r>
+            <a:endParaRPr lang="en-US" sz="1500" dirty="0"/>
+          </a:p>
+        </p:txBody>
+      </p:sp>
+      <p:sp>
+        <p:nvSpPr>
+          <p:cNvPr id="26" name="Text 24"/>
+          <p:cNvSpPr txBox="1"/>
+          <p:nvPr/>
+        </p:nvSpPr>
+        <p:spPr>
+          <a:xfrm>
+            <a:off x="877824" y="5376672"/>
+            <a:ext cx="10405872" cy="457200"/>
+          </a:xfrm>
+          <a:prstGeom prst="rect">
+            <a:avLst/>
+          </a:prstGeom>
+          <a:noFill/>
+          <a:ln/>
+        </p:spPr>
+        <p:txBody>
+          <a:bodyPr wrap="square" lIns="0" tIns="0" rIns="0" bIns="0" rtlCol="0" anchor="ctr"/>
+          <a:lstStyle/>
+          <a:p>
+            <a:pPr indent="0" marL="0">
+              <a:buNone/>
+            </a:pPr>
+            <a:r>
+              <a:rPr lang="en-US" sz="1250" dirty="0">
+                <a:solidFill>
+                  <a:srgbClr val="0F172A"/>
+                </a:solidFill>
+                <a:latin typeface="Calibri" pitchFamily="34" charset="0"/>
+                <a:ea typeface="Calibri" pitchFamily="34" charset="-122"/>
+                <a:cs typeface="Calibri" pitchFamily="34" charset="-120"/>
+              </a:rPr>
+              <a:t>A 47-county map splits reports too thin to mean anything. Cross-country rollup always; the regional breakdown only when a country is named.</a:t>
+            </a:r>
+            <a:endParaRPr lang="en-US" sz="1250" dirty="0"/>
+          </a:p>
+        </p:txBody>
+      </p:sp>
+    </p:spTree>
+  </p:cSld>
+  <p:clrMapOvr>
+    <a:masterClrMapping/>
+  </p:clrMapOvr>
+</p:sld>
+</file>
+
+<file path=ppt/slides/slide11.xml><?xml version="1.0" encoding="utf-8"?>
+<p:sld xmlns:a="http://schemas.openxmlformats.org/drawingml/2006/main" xmlns:r="http://schemas.openxmlformats.org/officeDocument/2006/relationships" xmlns:p="http://schemas.openxmlformats.org/presentationml/2006/main">
+  <p:cSld name="Slide 11">
     <p:bg>
       <p:bgPr>
         <a:solidFill>
@@ -2965,7 +3947,7 @@
         <p:spPr>
           <a:xfrm>
             <a:off x="566928" y="4261104"/>
-            <a:ext cx="11027664" cy="1828800"/>
+            <a:ext cx="11027664" cy="2286000"/>
           </a:xfrm>
           <a:prstGeom prst="rect">
             <a:avLst/>
@@ -2985,7 +3967,7 @@
               <a:buChar char="•"/>
             </a:pPr>
             <a:r>
-              <a:rPr lang="en-US" sz="1350" dirty="0">
+              <a:rPr lang="en-US" sz="1300" dirty="0">
                 <a:solidFill>
                   <a:srgbClr val="0F172A"/>
                 </a:solidFill>
@@ -2995,7 +3977,7 @@
               </a:rPr>
               <a:t>FastAPI backend with a full API surface that runs with zero external services</a:t>
             </a:r>
-            <a:endParaRPr lang="en-US" sz="1350" dirty="0"/>
+            <a:endParaRPr lang="en-US" sz="1300" dirty="0"/>
           </a:p>
           <a:p>
             <a:pPr marL="342900" indent="-342900">
@@ -3006,7 +3988,7 @@
               <a:buChar char="•"/>
             </a:pPr>
             <a:r>
-              <a:rPr lang="en-US" sz="1350" dirty="0">
+              <a:rPr lang="en-US" sz="1300" dirty="0">
                 <a:solidFill>
                   <a:srgbClr val="0F172A"/>
                 </a:solidFill>
@@ -3014,9 +3996,9 @@
                 <a:ea typeface="Calibri" pitchFamily="34" charset="-122"/>
                 <a:cs typeface="Calibri" pitchFamily="34" charset="-120"/>
               </a:rPr>
-              <a:t>Flutter Android-first app: check, help, report, lookup, feed, sentinel</a:t>
-            </a:r>
-            <a:endParaRPr lang="en-US" sz="1350" dirty="0"/>
+              <a:t>Flutter Android-first app: check, lookup, calls, help, alerts, sentinel</a:t>
+            </a:r>
+            <a:endParaRPr lang="en-US" sz="1300" dirty="0"/>
           </a:p>
           <a:p>
             <a:pPr marL="342900" indent="-342900">
@@ -3027,7 +4009,7 @@
               <a:buChar char="•"/>
             </a:pPr>
             <a:r>
-              <a:rPr lang="en-US" sz="1350" dirty="0">
+              <a:rPr lang="en-US" sz="1300" dirty="0">
                 <a:solidFill>
                   <a:srgbClr val="0F172A"/>
                 </a:solidFill>
@@ -3035,9 +4017,9 @@
                 <a:ea typeface="Calibri" pitchFamily="34" charset="-122"/>
                 <a:cs typeface="Calibri" pitchFamily="34" charset="-120"/>
               </a:rPr>
-              <a:t>Deployed landing page and a password-gated moderation dashboard</a:t>
-            </a:r>
-            <a:endParaRPr lang="en-US" sz="1350" dirty="0"/>
+              <a:t>Native Android screening for incoming calls, SMS and WhatsApp calls — runs with the app closed</a:t>
+            </a:r>
+            <a:endParaRPr lang="en-US" sz="1300" dirty="0"/>
           </a:p>
           <a:p>
             <a:pPr marL="342900" indent="-342900">
@@ -3048,7 +4030,7 @@
               <a:buChar char="•"/>
             </a:pPr>
             <a:r>
-              <a:rPr lang="en-US" sz="1350" dirty="0">
+              <a:rPr lang="en-US" sz="1300" dirty="0">
                 <a:solidFill>
                   <a:srgbClr val="0F172A"/>
                 </a:solidFill>
@@ -3056,9 +4038,9 @@
                 <a:ea typeface="Calibri" pitchFamily="34" charset="-122"/>
                 <a:cs typeface="Calibri" pitchFamily="34" charset="-120"/>
               </a:rPr>
-              <a:t>Supabase schema with Row Level Security, and a synthetic dataset disclosed in full</a:t>
-            </a:r>
-            <a:endParaRPr lang="en-US" sz="1350" dirty="0"/>
+              <a:t>Deployed landing page and a password-gated moderation dashboard</a:t>
+            </a:r>
+            <a:endParaRPr lang="en-US" sz="1300" dirty="0"/>
           </a:p>
           <a:p>
             <a:pPr marL="342900" indent="-342900">
@@ -3069,7 +4051,7 @@
               <a:buChar char="•"/>
             </a:pPr>
             <a:r>
-              <a:rPr lang="en-US" sz="1350" dirty="0">
+              <a:rPr lang="en-US" sz="1300" dirty="0">
                 <a:solidFill>
                   <a:srgbClr val="0F172A"/>
                 </a:solidFill>
@@ -3077,9 +4059,30 @@
                 <a:ea typeface="Calibri" pitchFamily="34" charset="-122"/>
                 <a:cs typeface="Calibri" pitchFamily="34" charset="-120"/>
               </a:rPr>
+              <a:t>Supabase schema with Row Level Security, and a synthetic dataset disclosed in full</a:t>
+            </a:r>
+            <a:endParaRPr lang="en-US" sz="1300" dirty="0"/>
+          </a:p>
+          <a:p>
+            <a:pPr marL="342900" indent="-342900">
+              <a:spcAft>
+                <a:spcPts val="700"/>
+              </a:spcAft>
+              <a:buSzPct val="100000"/>
+              <a:buChar char="•"/>
+            </a:pPr>
+            <a:r>
+              <a:rPr lang="en-US" sz="1300" dirty="0">
+                <a:solidFill>
+                  <a:srgbClr val="0F172A"/>
+                </a:solidFill>
+                <a:latin typeface="Calibri" pitchFamily="34" charset="0"/>
+                <a:ea typeface="Calibri" pitchFamily="34" charset="-122"/>
+                <a:cs typeface="Calibri" pitchFamily="34" charset="-120"/>
+              </a:rPr>
               <a:t>Version-pinned dependencies, CI running pytest plus web build and lint on every push</a:t>
             </a:r>
-            <a:endParaRPr lang="en-US" sz="1350" dirty="0"/>
+            <a:endParaRPr lang="en-US" sz="1300" dirty="0"/>
           </a:p>
         </p:txBody>
       </p:sp>
@@ -3091,9 +4094,9 @@
 </p:sld>
 </file>
 
-<file path=ppt/slides/slide11.xml><?xml version="1.0" encoding="utf-8"?>
+<file path=ppt/slides/slide12.xml><?xml version="1.0" encoding="utf-8"?>
 <p:sld xmlns:a="http://schemas.openxmlformats.org/drawingml/2006/main" xmlns:r="http://schemas.openxmlformats.org/officeDocument/2006/relationships" xmlns:p="http://schemas.openxmlformats.org/presentationml/2006/main">
-  <p:cSld name="Slide 11">
+  <p:cSld name="Slide 12">
     <p:bg>
       <p:bgPr>
         <a:solidFill>
@@ -4172,9 +5175,9 @@
 </p:sld>
 </file>
 
-<file path=ppt/slides/slide12.xml><?xml version="1.0" encoding="utf-8"?>
+<file path=ppt/slides/slide13.xml><?xml version="1.0" encoding="utf-8"?>
 <p:sld xmlns:a="http://schemas.openxmlformats.org/drawingml/2006/main" xmlns:r="http://schemas.openxmlformats.org/officeDocument/2006/relationships" xmlns:p="http://schemas.openxmlformats.org/presentationml/2006/main">
-  <p:cSld name="Slide 12">
+  <p:cSld name="Slide 13">
     <p:bg>
       <p:bgPr>
         <a:solidFill>
@@ -5151,9 +6154,9 @@
 </p:sld>
 </file>
 
-<file path=ppt/slides/slide13.xml><?xml version="1.0" encoding="utf-8"?>
+<file path=ppt/slides/slide14.xml><?xml version="1.0" encoding="utf-8"?>
 <p:sld xmlns:a="http://schemas.openxmlformats.org/drawingml/2006/main" xmlns:r="http://schemas.openxmlformats.org/officeDocument/2006/relationships" xmlns:p="http://schemas.openxmlformats.org/presentationml/2006/main">
-  <p:cSld name="Slide 13">
+  <p:cSld name="Slide 14">
     <p:bg>
       <p:bgPr>
         <a:solidFill>
@@ -8249,17 +9252,17 @@
         </p:nvSpPr>
         <p:spPr>
           <a:xfrm>
-            <a:off x="566928" y="5358384"/>
-            <a:ext cx="11027664" cy="365760"/>
-          </a:xfrm>
-          <a:prstGeom prst="rect">
-            <a:avLst/>
-          </a:prstGeom>
-          <a:noFill/>
-          <a:ln/>
-        </p:spPr>
-        <p:txBody>
-          <a:bodyPr wrap="square" lIns="0" tIns="0" rIns="0" bIns="0" rtlCol="0" anchor="ctr"/>
+            <a:off x="566928" y="5212080"/>
+            <a:ext cx="11027664" cy="457200"/>
+          </a:xfrm>
+          <a:prstGeom prst="rect">
+            <a:avLst/>
+          </a:prstGeom>
+          <a:noFill/>
+          <a:ln/>
+        </p:spPr>
+        <p:txBody>
+          <a:bodyPr wrap="square" lIns="0" tIns="0" rIns="0" bIns="0" rtlCol="0" anchor="t"/>
           <a:lstStyle/>
           <a:p>
             <a:pPr indent="0" marL="0">
@@ -8275,6 +9278,45 @@
                 <a:cs typeface="Calibri" pitchFamily="34" charset="-120"/>
               </a:rPr>
               <a:t>A verdict without a next step is only half an answer — so every non-safe verdict ships with the pathway attached, not behind another tap.</a:t>
+            </a:r>
+            <a:endParaRPr lang="en-US" sz="1350" dirty="0"/>
+          </a:p>
+        </p:txBody>
+      </p:sp>
+      <p:sp>
+        <p:nvSpPr>
+          <p:cNvPr id="21" name="Text 19"/>
+          <p:cNvSpPr txBox="1"/>
+          <p:nvPr/>
+        </p:nvSpPr>
+        <p:spPr>
+          <a:xfrm>
+            <a:off x="566928" y="5797296"/>
+            <a:ext cx="11027664" cy="457200"/>
+          </a:xfrm>
+          <a:prstGeom prst="rect">
+            <a:avLst/>
+          </a:prstGeom>
+          <a:noFill/>
+          <a:ln/>
+        </p:spPr>
+        <p:txBody>
+          <a:bodyPr wrap="square" lIns="0" tIns="0" rIns="0" bIns="0" rtlCol="0" anchor="t"/>
+          <a:lstStyle/>
+          <a:p>
+            <a:pPr indent="0" marL="0">
+              <a:buNone/>
+            </a:pPr>
+            <a:r>
+              <a:rPr lang="en-US" sz="1350" i="1" dirty="0">
+                <a:solidFill>
+                  <a:srgbClr val="64748B"/>
+                </a:solidFill>
+                <a:latin typeface="Calibri" pitchFamily="34" charset="0"/>
+                <a:ea typeface="Calibri" pitchFamily="34" charset="-122"/>
+                <a:cs typeface="Calibri" pitchFamily="34" charset="-120"/>
+              </a:rPr>
+              <a:t>And on Android the first beat no longer waits to be asked — Call Guard screens incoming calls, texts and WhatsApp calls as they arrive.</a:t>
             </a:r>
             <a:endParaRPr lang="en-US" sz="1350" dirty="0"/>
           </a:p>
@@ -8384,7 +9426,7 @@
                 <a:ea typeface="Arial" pitchFamily="34" charset="-122"/>
                 <a:cs typeface="Arial" pitchFamily="34" charset="-120"/>
               </a:rPr>
-              <a:t>Six modules, one backend, one shared database.</a:t>
+              <a:t>Seven modules, one backend, one shared database.</a:t>
             </a:r>
             <a:endParaRPr lang="en-US" sz="3200" dirty="0"/>
           </a:p>
@@ -8398,12 +9440,12 @@
         </p:nvSpPr>
         <p:spPr>
           <a:xfrm>
-            <a:off x="566928" y="1755648"/>
-            <a:ext cx="5349240" cy="1115568"/>
+            <a:off x="566928" y="1700784"/>
+            <a:ext cx="5349240" cy="1060704"/>
           </a:xfrm>
           <a:prstGeom prst="roundRect">
             <a:avLst>
-              <a:gd name="adj" fmla="val 6557"/>
+              <a:gd name="adj" fmla="val 6897"/>
             </a:avLst>
           </a:prstGeom>
           <a:solidFill>
@@ -8427,8 +9469,8 @@
         </p:nvSpPr>
         <p:spPr>
           <a:xfrm>
-            <a:off x="877824" y="1938528"/>
-            <a:ext cx="4727448" cy="292608"/>
+            <a:off x="877824" y="1856232"/>
+            <a:ext cx="4727448" cy="274320"/>
           </a:xfrm>
           <a:prstGeom prst="rect">
             <a:avLst/>
@@ -8466,7 +9508,7 @@
         </p:nvSpPr>
         <p:spPr>
           <a:xfrm>
-            <a:off x="877824" y="2267712"/>
+            <a:off x="877824" y="2157984"/>
             <a:ext cx="4727448" cy="512064"/>
           </a:xfrm>
           <a:prstGeom prst="rect">
@@ -8505,12 +9547,12 @@
         </p:nvSpPr>
         <p:spPr>
           <a:xfrm>
-            <a:off x="6245352" y="1755648"/>
-            <a:ext cx="5349240" cy="1115568"/>
+            <a:off x="6245352" y="1700784"/>
+            <a:ext cx="5349240" cy="1060704"/>
           </a:xfrm>
           <a:prstGeom prst="roundRect">
             <a:avLst>
-              <a:gd name="adj" fmla="val 6557"/>
+              <a:gd name="adj" fmla="val 6897"/>
             </a:avLst>
           </a:prstGeom>
           <a:solidFill>
@@ -8534,8 +9576,8 @@
         </p:nvSpPr>
         <p:spPr>
           <a:xfrm>
-            <a:off x="6556248" y="1938528"/>
-            <a:ext cx="4727448" cy="292608"/>
+            <a:off x="6556248" y="1856232"/>
+            <a:ext cx="4727448" cy="274320"/>
           </a:xfrm>
           <a:prstGeom prst="rect">
             <a:avLst/>
@@ -8573,7 +9615,7 @@
         </p:nvSpPr>
         <p:spPr>
           <a:xfrm>
-            <a:off x="6556248" y="2267712"/>
+            <a:off x="6556248" y="2157984"/>
             <a:ext cx="4727448" cy="512064"/>
           </a:xfrm>
           <a:prstGeom prst="rect">
@@ -8612,12 +9654,12 @@
         </p:nvSpPr>
         <p:spPr>
           <a:xfrm>
-            <a:off x="566928" y="3054096"/>
-            <a:ext cx="5349240" cy="1115568"/>
+            <a:off x="566928" y="2889504"/>
+            <a:ext cx="5349240" cy="1060704"/>
           </a:xfrm>
           <a:prstGeom prst="roundRect">
             <a:avLst>
-              <a:gd name="adj" fmla="val 6557"/>
+              <a:gd name="adj" fmla="val 6897"/>
             </a:avLst>
           </a:prstGeom>
           <a:solidFill>
@@ -8641,8 +9683,8 @@
         </p:nvSpPr>
         <p:spPr>
           <a:xfrm>
-            <a:off x="877824" y="3236976"/>
-            <a:ext cx="4727448" cy="292608"/>
+            <a:off x="877824" y="3044952"/>
+            <a:ext cx="4727448" cy="274320"/>
           </a:xfrm>
           <a:prstGeom prst="rect">
             <a:avLst/>
@@ -8680,7 +9722,7 @@
         </p:nvSpPr>
         <p:spPr>
           <a:xfrm>
-            <a:off x="877824" y="3566160"/>
+            <a:off x="877824" y="3346704"/>
             <a:ext cx="4727448" cy="512064"/>
           </a:xfrm>
           <a:prstGeom prst="rect">
@@ -8719,12 +9761,12 @@
         </p:nvSpPr>
         <p:spPr>
           <a:xfrm>
-            <a:off x="6245352" y="3054096"/>
-            <a:ext cx="5349240" cy="1115568"/>
+            <a:off x="6245352" y="2889504"/>
+            <a:ext cx="5349240" cy="1060704"/>
           </a:xfrm>
           <a:prstGeom prst="roundRect">
             <a:avLst>
-              <a:gd name="adj" fmla="val 6557"/>
+              <a:gd name="adj" fmla="val 6897"/>
             </a:avLst>
           </a:prstGeom>
           <a:solidFill>
@@ -8748,8 +9790,8 @@
         </p:nvSpPr>
         <p:spPr>
           <a:xfrm>
-            <a:off x="6556248" y="3236976"/>
-            <a:ext cx="4727448" cy="292608"/>
+            <a:off x="6556248" y="3044952"/>
+            <a:ext cx="4727448" cy="274320"/>
           </a:xfrm>
           <a:prstGeom prst="rect">
             <a:avLst/>
@@ -8787,7 +9829,7 @@
         </p:nvSpPr>
         <p:spPr>
           <a:xfrm>
-            <a:off x="6556248" y="3566160"/>
+            <a:off x="6556248" y="3346704"/>
             <a:ext cx="4727448" cy="512064"/>
           </a:xfrm>
           <a:prstGeom prst="rect">
@@ -8826,12 +9868,12 @@
         </p:nvSpPr>
         <p:spPr>
           <a:xfrm>
-            <a:off x="566928" y="4352544"/>
-            <a:ext cx="5349240" cy="1115568"/>
+            <a:off x="566928" y="4078224"/>
+            <a:ext cx="5349240" cy="1060704"/>
           </a:xfrm>
           <a:prstGeom prst="roundRect">
             <a:avLst>
-              <a:gd name="adj" fmla="val 6557"/>
+              <a:gd name="adj" fmla="val 6897"/>
             </a:avLst>
           </a:prstGeom>
           <a:solidFill>
@@ -8855,46 +9897,46 @@
         </p:nvSpPr>
         <p:spPr>
           <a:xfrm>
+            <a:off x="877824" y="4233672"/>
+            <a:ext cx="4727448" cy="274320"/>
+          </a:xfrm>
+          <a:prstGeom prst="rect">
+            <a:avLst/>
+          </a:prstGeom>
+          <a:noFill/>
+          <a:ln/>
+        </p:spPr>
+        <p:txBody>
+          <a:bodyPr wrap="square" lIns="0" tIns="0" rIns="0" bIns="0" rtlCol="0" anchor="ctr"/>
+          <a:lstStyle/>
+          <a:p>
+            <a:pPr indent="0" marL="0">
+              <a:buNone/>
+            </a:pPr>
+            <a:r>
+              <a:rPr lang="en-US" sz="1600" b="1" dirty="0">
+                <a:solidFill>
+                  <a:srgbClr val="0F6B5C"/>
+                </a:solidFill>
+                <a:latin typeface="Arial" pitchFamily="34" charset="0"/>
+                <a:ea typeface="Arial" pitchFamily="34" charset="-122"/>
+                <a:cs typeface="Arial" pitchFamily="34" charset="-120"/>
+              </a:rPr>
+              <a:t>Trending &amp; Hotspots</a:t>
+            </a:r>
+            <a:endParaRPr lang="en-US" sz="1600" dirty="0"/>
+          </a:p>
+        </p:txBody>
+      </p:sp>
+      <p:sp>
+        <p:nvSpPr>
+          <p:cNvPr id="18" name="Text 16"/>
+          <p:cNvSpPr txBox="1"/>
+          <p:nvPr/>
+        </p:nvSpPr>
+        <p:spPr>
+          <a:xfrm>
             <a:off x="877824" y="4535424"/>
-            <a:ext cx="4727448" cy="292608"/>
-          </a:xfrm>
-          <a:prstGeom prst="rect">
-            <a:avLst/>
-          </a:prstGeom>
-          <a:noFill/>
-          <a:ln/>
-        </p:spPr>
-        <p:txBody>
-          <a:bodyPr wrap="square" lIns="0" tIns="0" rIns="0" bIns="0" rtlCol="0" anchor="ctr"/>
-          <a:lstStyle/>
-          <a:p>
-            <a:pPr indent="0" marL="0">
-              <a:buNone/>
-            </a:pPr>
-            <a:r>
-              <a:rPr lang="en-US" sz="1600" b="1" dirty="0">
-                <a:solidFill>
-                  <a:srgbClr val="0F6B5C"/>
-                </a:solidFill>
-                <a:latin typeface="Arial" pitchFamily="34" charset="0"/>
-                <a:ea typeface="Arial" pitchFamily="34" charset="-122"/>
-                <a:cs typeface="Arial" pitchFamily="34" charset="-120"/>
-              </a:rPr>
-              <a:t>Trending &amp; Hotspots</a:t>
-            </a:r>
-            <a:endParaRPr lang="en-US" sz="1600" dirty="0"/>
-          </a:p>
-        </p:txBody>
-      </p:sp>
-      <p:sp>
-        <p:nvSpPr>
-          <p:cNvPr id="18" name="Text 16"/>
-          <p:cNvSpPr txBox="1"/>
-          <p:nvPr/>
-        </p:nvSpPr>
-        <p:spPr>
-          <a:xfrm>
-            <a:off x="877824" y="4864608"/>
             <a:ext cx="4727448" cy="512064"/>
           </a:xfrm>
           <a:prstGeom prst="rect">
@@ -8933,12 +9975,12 @@
         </p:nvSpPr>
         <p:spPr>
           <a:xfrm>
-            <a:off x="6245352" y="4352544"/>
-            <a:ext cx="5349240" cy="1115568"/>
+            <a:off x="6245352" y="4078224"/>
+            <a:ext cx="5349240" cy="1060704"/>
           </a:xfrm>
           <a:prstGeom prst="roundRect">
             <a:avLst>
-              <a:gd name="adj" fmla="val 6557"/>
+              <a:gd name="adj" fmla="val 6897"/>
             </a:avLst>
           </a:prstGeom>
           <a:solidFill>
@@ -8962,46 +10004,46 @@
         </p:nvSpPr>
         <p:spPr>
           <a:xfrm>
+            <a:off x="6556248" y="4233672"/>
+            <a:ext cx="4727448" cy="274320"/>
+          </a:xfrm>
+          <a:prstGeom prst="rect">
+            <a:avLst/>
+          </a:prstGeom>
+          <a:noFill/>
+          <a:ln/>
+        </p:spPr>
+        <p:txBody>
+          <a:bodyPr wrap="square" lIns="0" tIns="0" rIns="0" bIns="0" rtlCol="0" anchor="ctr"/>
+          <a:lstStyle/>
+          <a:p>
+            <a:pPr indent="0" marL="0">
+              <a:buNone/>
+            </a:pPr>
+            <a:r>
+              <a:rPr lang="en-US" sz="1600" b="1" dirty="0">
+                <a:solidFill>
+                  <a:srgbClr val="0F6B5C"/>
+                </a:solidFill>
+                <a:latin typeface="Arial" pitchFamily="34" charset="0"/>
+                <a:ea typeface="Arial" pitchFamily="34" charset="-122"/>
+                <a:cs typeface="Arial" pitchFamily="34" charset="-120"/>
+              </a:rPr>
+              <a:t>Agent Fraud Sentinel</a:t>
+            </a:r>
+            <a:endParaRPr lang="en-US" sz="1600" dirty="0"/>
+          </a:p>
+        </p:txBody>
+      </p:sp>
+      <p:sp>
+        <p:nvSpPr>
+          <p:cNvPr id="21" name="Text 19"/>
+          <p:cNvSpPr txBox="1"/>
+          <p:nvPr/>
+        </p:nvSpPr>
+        <p:spPr>
+          <a:xfrm>
             <a:off x="6556248" y="4535424"/>
-            <a:ext cx="4727448" cy="292608"/>
-          </a:xfrm>
-          <a:prstGeom prst="rect">
-            <a:avLst/>
-          </a:prstGeom>
-          <a:noFill/>
-          <a:ln/>
-        </p:spPr>
-        <p:txBody>
-          <a:bodyPr wrap="square" lIns="0" tIns="0" rIns="0" bIns="0" rtlCol="0" anchor="ctr"/>
-          <a:lstStyle/>
-          <a:p>
-            <a:pPr indent="0" marL="0">
-              <a:buNone/>
-            </a:pPr>
-            <a:r>
-              <a:rPr lang="en-US" sz="1600" b="1" dirty="0">
-                <a:solidFill>
-                  <a:srgbClr val="0F6B5C"/>
-                </a:solidFill>
-                <a:latin typeface="Arial" pitchFamily="34" charset="0"/>
-                <a:ea typeface="Arial" pitchFamily="34" charset="-122"/>
-                <a:cs typeface="Arial" pitchFamily="34" charset="-120"/>
-              </a:rPr>
-              <a:t>Agent Fraud Sentinel</a:t>
-            </a:r>
-            <a:endParaRPr lang="en-US" sz="1600" dirty="0"/>
-          </a:p>
-        </p:txBody>
-      </p:sp>
-      <p:sp>
-        <p:nvSpPr>
-          <p:cNvPr id="21" name="Text 19"/>
-          <p:cNvSpPr txBox="1"/>
-          <p:nvPr/>
-        </p:nvSpPr>
-        <p:spPr>
-          <a:xfrm>
-            <a:off x="6556248" y="4864608"/>
             <a:ext cx="4727448" cy="512064"/>
           </a:xfrm>
           <a:prstGeom prst="rect">
@@ -9034,13 +10076,120 @@
       </p:sp>
       <p:sp>
         <p:nvSpPr>
-          <p:cNvPr id="22" name="Text 20"/>
-          <p:cNvSpPr txBox="1"/>
-          <p:nvPr/>
-        </p:nvSpPr>
-        <p:spPr>
-          <a:xfrm>
-            <a:off x="566928" y="5596128"/>
+          <p:cNvPr id="22" name="Shape 20"/>
+          <p:cNvSpPr/>
+          <p:nvPr/>
+        </p:nvSpPr>
+        <p:spPr>
+          <a:xfrm>
+            <a:off x="566928" y="5230368"/>
+            <a:ext cx="11027664" cy="841248"/>
+          </a:xfrm>
+          <a:prstGeom prst="roundRect">
+            <a:avLst>
+              <a:gd name="adj" fmla="val 8696"/>
+            </a:avLst>
+          </a:prstGeom>
+          <a:solidFill>
+            <a:srgbClr val="0F6B5C"/>
+          </a:solidFill>
+          <a:ln/>
+          <a:effectLst>
+            <a:outerShdw sx="100000" sy="100000" kx="0" ky="0" algn="bl" rotWithShape="0" blurRad="127000" dist="25400" dir="5400000">
+              <a:srgbClr val="0F172A">
+                <a:alpha val="10000"/>
+              </a:srgbClr>
+            </a:outerShdw>
+          </a:effectLst>
+        </p:spPr>
+      </p:sp>
+      <p:sp>
+        <p:nvSpPr>
+          <p:cNvPr id="23" name="Text 21"/>
+          <p:cNvSpPr txBox="1"/>
+          <p:nvPr/>
+        </p:nvSpPr>
+        <p:spPr>
+          <a:xfrm>
+            <a:off x="877824" y="5367528"/>
+            <a:ext cx="2377440" cy="274320"/>
+          </a:xfrm>
+          <a:prstGeom prst="rect">
+            <a:avLst/>
+          </a:prstGeom>
+          <a:noFill/>
+          <a:ln/>
+        </p:spPr>
+        <p:txBody>
+          <a:bodyPr wrap="square" lIns="0" tIns="0" rIns="0" bIns="0" rtlCol="0" anchor="ctr"/>
+          <a:lstStyle/>
+          <a:p>
+            <a:pPr indent="0" marL="0">
+              <a:buNone/>
+            </a:pPr>
+            <a:r>
+              <a:rPr lang="en-US" sz="1600" b="1" dirty="0">
+                <a:solidFill>
+                  <a:srgbClr val="FFFFFF"/>
+                </a:solidFill>
+                <a:latin typeface="Arial" pitchFamily="34" charset="0"/>
+                <a:ea typeface="Arial" pitchFamily="34" charset="-122"/>
+                <a:cs typeface="Arial" pitchFamily="34" charset="-120"/>
+              </a:rPr>
+              <a:t>Call Guard</a:t>
+            </a:r>
+            <a:endParaRPr lang="en-US" sz="1600" dirty="0"/>
+          </a:p>
+        </p:txBody>
+      </p:sp>
+      <p:sp>
+        <p:nvSpPr>
+          <p:cNvPr id="24" name="Text 22"/>
+          <p:cNvSpPr txBox="1"/>
+          <p:nvPr/>
+        </p:nvSpPr>
+        <p:spPr>
+          <a:xfrm>
+            <a:off x="877824" y="5669280"/>
+            <a:ext cx="10405872" cy="310896"/>
+          </a:xfrm>
+          <a:prstGeom prst="rect">
+            <a:avLst/>
+          </a:prstGeom>
+          <a:noFill/>
+          <a:ln/>
+        </p:spPr>
+        <p:txBody>
+          <a:bodyPr wrap="square" lIns="0" tIns="0" rIns="0" bIns="0" rtlCol="0" anchor="ctr"/>
+          <a:lstStyle/>
+          <a:p>
+            <a:pPr indent="0" marL="0">
+              <a:buNone/>
+            </a:pPr>
+            <a:r>
+              <a:rPr lang="en-US" sz="1250" dirty="0">
+                <a:solidFill>
+                  <a:srgbClr val="DCEDE9"/>
+                </a:solidFill>
+                <a:latin typeface="Calibri" pitchFamily="34" charset="0"/>
+                <a:ea typeface="Calibri" pitchFamily="34" charset="-122"/>
+                <a:cs typeface="Calibri" pitchFamily="34" charset="-120"/>
+              </a:rPr>
+              <a:t>Screens incoming calls, SMS and WhatsApp calls — natively on Android, so it works with the app closed.</a:t>
+            </a:r>
+            <a:endParaRPr lang="en-US" sz="1250" dirty="0"/>
+          </a:p>
+        </p:txBody>
+      </p:sp>
+      <p:sp>
+        <p:nvSpPr>
+          <p:cNvPr id="25" name="Text 23"/>
+          <p:cNvSpPr txBox="1"/>
+          <p:nvPr/>
+        </p:nvSpPr>
+        <p:spPr>
+          <a:xfrm>
+            <a:off x="566928" y="6199632"/>
             <a:ext cx="11027664" cy="365760"/>
           </a:xfrm>
           <a:prstGeom prst="rect">
@@ -9136,7 +10285,7 @@
                 <a:ea typeface="Arial" pitchFamily="34" charset="-122"/>
                 <a:cs typeface="Arial" pitchFamily="34" charset="-120"/>
               </a:rPr>
-              <a:t>IT RUNS</a:t>
+              <a:t>CALL GUARD</a:t>
             </a:r>
             <a:endParaRPr lang="en-US" sz="1200" dirty="0"/>
           </a:p>
@@ -9175,139 +10324,165 @@
                 <a:ea typeface="Arial" pitchFamily="34" charset="-122"/>
                 <a:cs typeface="Arial" pitchFamily="34" charset="-120"/>
               </a:rPr>
-              <a:t>Not slideware — this is the running product.</a:t>
+              <a:t>It warns you before you pick up.</a:t>
             </a:r>
             <a:endParaRPr lang="en-US" sz="3200" dirty="0"/>
           </a:p>
         </p:txBody>
       </p:sp>
-      <p:pic>
-        <p:nvPicPr>
-          <p:cNvPr id="4" name="Image 0" descr="/Users/Lester/Documents/GitHub/ChengetAi/docs/screenshots/admin-overview.png">    </p:cNvPr>
-          <p:cNvPicPr>
-            <a:picLocks noChangeAspect="1"/>
-          </p:cNvPicPr>
-          <p:nvPr/>
-        </p:nvPicPr>
-        <p:blipFill>
-          <a:blip r:embed="rId1"/>
-          <a:srcRect l="0" r="0" t="0" b="0"/>
-          <a:stretch/>
-        </p:blipFill>
-        <p:spPr>
-          <a:xfrm>
-            <a:off x="566928" y="1572768"/>
-            <a:ext cx="7772400" cy="4224528"/>
-          </a:xfrm>
-          <a:prstGeom prst="rect">
-            <a:avLst/>
-          </a:prstGeom>
-        </p:spPr>
-      </p:pic>
-      <p:sp>
-        <p:nvSpPr>
-          <p:cNvPr id="5" name="Text 2"/>
-          <p:cNvSpPr txBox="1"/>
-          <p:nvPr/>
-        </p:nvSpPr>
-        <p:spPr>
-          <a:xfrm>
-            <a:off x="8558784" y="1700784"/>
-            <a:ext cx="3017520" cy="274320"/>
-          </a:xfrm>
-          <a:prstGeom prst="rect">
-            <a:avLst/>
-          </a:prstGeom>
-          <a:noFill/>
-          <a:ln/>
-        </p:spPr>
-        <p:txBody>
-          <a:bodyPr wrap="square" lIns="0" tIns="0" rIns="0" bIns="0" rtlCol="0" anchor="ctr"/>
-          <a:lstStyle/>
-          <a:p>
-            <a:pPr indent="0" marL="0">
-              <a:buNone/>
-            </a:pPr>
-            <a:r>
-              <a:rPr lang="en-US" sz="1500" b="1" dirty="0">
-                <a:solidFill>
-                  <a:srgbClr val="0F6B5C"/>
-                </a:solidFill>
-                <a:latin typeface="Arial" pitchFamily="34" charset="0"/>
-                <a:ea typeface="Arial" pitchFamily="34" charset="-122"/>
-                <a:cs typeface="Arial" pitchFamily="34" charset="-120"/>
-              </a:rPr>
-              <a:t>Live data</a:t>
-            </a:r>
-            <a:endParaRPr lang="en-US" sz="1500" dirty="0"/>
-          </a:p>
-        </p:txBody>
-      </p:sp>
-      <p:sp>
-        <p:nvSpPr>
-          <p:cNvPr id="6" name="Text 3"/>
-          <p:cNvSpPr txBox="1"/>
-          <p:nvPr/>
-        </p:nvSpPr>
-        <p:spPr>
-          <a:xfrm>
-            <a:off x="8558784" y="2011680"/>
-            <a:ext cx="3017520" cy="914400"/>
-          </a:xfrm>
-          <a:prstGeom prst="rect">
-            <a:avLst/>
-          </a:prstGeom>
-          <a:noFill/>
-          <a:ln/>
-        </p:spPr>
-        <p:txBody>
-          <a:bodyPr wrap="square" lIns="0" tIns="0" rIns="0" bIns="0" rtlCol="0" anchor="ctr"/>
-          <a:lstStyle/>
-          <a:p>
-            <a:pPr indent="0" marL="0">
-              <a:buNone/>
-            </a:pPr>
-            <a:r>
-              <a:rPr lang="en-US" sz="1250" dirty="0">
-                <a:solidFill>
-                  <a:srgbClr val="0F172A"/>
+      <p:sp>
+        <p:nvSpPr>
+          <p:cNvPr id="4" name="Text 2"/>
+          <p:cNvSpPr txBox="1"/>
+          <p:nvPr/>
+        </p:nvSpPr>
+        <p:spPr>
+          <a:xfrm>
+            <a:off x="566928" y="1737360"/>
+            <a:ext cx="9692640" cy="402336"/>
+          </a:xfrm>
+          <a:prstGeom prst="rect">
+            <a:avLst/>
+          </a:prstGeom>
+          <a:noFill/>
+          <a:ln/>
+        </p:spPr>
+        <p:txBody>
+          <a:bodyPr wrap="square" lIns="0" tIns="0" rIns="0" bIns="0" rtlCol="0" anchor="ctr"/>
+          <a:lstStyle/>
+          <a:p>
+            <a:pPr indent="0" marL="0">
+              <a:buNone/>
+            </a:pPr>
+            <a:r>
+              <a:rPr lang="en-US" sz="1400" dirty="0">
+                <a:solidFill>
+                  <a:srgbClr val="64748B"/>
                 </a:solidFill>
                 <a:latin typeface="Calibri" pitchFamily="34" charset="0"/>
                 <a:ea typeface="Calibri" pitchFamily="34" charset="-122"/>
                 <a:cs typeface="Calibri" pitchFamily="34" charset="-120"/>
               </a:rPr>
-              <a:t>Trending categories and the country hotspot map are computed from the reports table on every request.</a:t>
-            </a:r>
-            <a:endParaRPr lang="en-US" sz="1250" dirty="0"/>
-          </a:p>
-        </p:txBody>
-      </p:sp>
-      <p:sp>
-        <p:nvSpPr>
-          <p:cNvPr id="7" name="Text 4"/>
-          <p:cNvSpPr txBox="1"/>
-          <p:nvPr/>
-        </p:nvSpPr>
-        <p:spPr>
-          <a:xfrm>
-            <a:off x="8558784" y="3127248"/>
-            <a:ext cx="3017520" cy="274320"/>
-          </a:xfrm>
-          <a:prstGeom prst="rect">
-            <a:avLst/>
-          </a:prstGeom>
-          <a:noFill/>
-          <a:ln/>
-        </p:spPr>
-        <p:txBody>
-          <a:bodyPr wrap="square" lIns="0" tIns="0" rIns="0" bIns="0" rtlCol="0" anchor="ctr"/>
-          <a:lstStyle/>
-          <a:p>
-            <a:pPr indent="0" marL="0">
-              <a:buNone/>
-            </a:pPr>
-            <a:r>
-              <a:rPr lang="en-US" sz="1500" b="1" dirty="0">
+              <a:t>Pasting a message assumes the user already suspects something. Call Guard drops that assumption: the check runs as the call, text or WhatsApp call arrives.</a:t>
+            </a:r>
+            <a:endParaRPr lang="en-US" sz="1400" dirty="0"/>
+          </a:p>
+        </p:txBody>
+      </p:sp>
+      <p:sp>
+        <p:nvSpPr>
+          <p:cNvPr id="5" name="Shape 3"/>
+          <p:cNvSpPr/>
+          <p:nvPr/>
+        </p:nvSpPr>
+        <p:spPr>
+          <a:xfrm>
+            <a:off x="566928" y="2157984"/>
+            <a:ext cx="3493008" cy="2048256"/>
+          </a:xfrm>
+          <a:prstGeom prst="roundRect">
+            <a:avLst>
+              <a:gd name="adj" fmla="val 3571"/>
+            </a:avLst>
+          </a:prstGeom>
+          <a:solidFill>
+            <a:srgbClr val="F4FAF8"/>
+          </a:solidFill>
+          <a:ln/>
+          <a:effectLst>
+            <a:outerShdw sx="100000" sy="100000" kx="0" ky="0" algn="bl" rotWithShape="0" blurRad="127000" dist="25400" dir="5400000">
+              <a:srgbClr val="0F172A">
+                <a:alpha val="10000"/>
+              </a:srgbClr>
+            </a:outerShdw>
+          </a:effectLst>
+        </p:spPr>
+      </p:sp>
+      <p:sp>
+        <p:nvSpPr>
+          <p:cNvPr id="6" name="Shape 4"/>
+          <p:cNvSpPr/>
+          <p:nvPr/>
+        </p:nvSpPr>
+        <p:spPr>
+          <a:xfrm>
+            <a:off x="877824" y="2359152"/>
+            <a:ext cx="457200" cy="457200"/>
+          </a:xfrm>
+          <a:prstGeom prst="ellipse">
+            <a:avLst/>
+          </a:prstGeom>
+          <a:solidFill>
+            <a:srgbClr val="0F6B5C"/>
+          </a:solidFill>
+          <a:ln/>
+        </p:spPr>
+      </p:sp>
+      <p:sp>
+        <p:nvSpPr>
+          <p:cNvPr id="7" name="Text 5"/>
+          <p:cNvSpPr txBox="1"/>
+          <p:nvPr/>
+        </p:nvSpPr>
+        <p:spPr>
+          <a:xfrm>
+            <a:off x="877824" y="2359152"/>
+            <a:ext cx="457200" cy="457200"/>
+          </a:xfrm>
+          <a:prstGeom prst="rect">
+            <a:avLst/>
+          </a:prstGeom>
+          <a:noFill/>
+          <a:ln/>
+        </p:spPr>
+        <p:txBody>
+          <a:bodyPr wrap="square" lIns="0" tIns="0" rIns="0" bIns="0" rtlCol="0" anchor="ctr"/>
+          <a:lstStyle/>
+          <a:p>
+            <a:pPr algn="ctr" indent="0" marL="0">
+              <a:buNone/>
+            </a:pPr>
+            <a:r>
+              <a:rPr lang="en-US" sz="1400" b="1" dirty="0">
+                <a:solidFill>
+                  <a:srgbClr val="FFFFFF"/>
+                </a:solidFill>
+                <a:latin typeface="Arial" pitchFamily="34" charset="0"/>
+                <a:ea typeface="Arial" pitchFamily="34" charset="-122"/>
+                <a:cs typeface="Arial" pitchFamily="34" charset="-120"/>
+              </a:rPr>
+              <a:t>1</a:t>
+            </a:r>
+            <a:endParaRPr lang="en-US" sz="1400" dirty="0"/>
+          </a:p>
+        </p:txBody>
+      </p:sp>
+      <p:sp>
+        <p:nvSpPr>
+          <p:cNvPr id="8" name="Text 6"/>
+          <p:cNvSpPr txBox="1"/>
+          <p:nvPr/>
+        </p:nvSpPr>
+        <p:spPr>
+          <a:xfrm>
+            <a:off x="877824" y="2889504"/>
+            <a:ext cx="2871216" cy="274320"/>
+          </a:xfrm>
+          <a:prstGeom prst="rect">
+            <a:avLst/>
+          </a:prstGeom>
+          <a:noFill/>
+          <a:ln/>
+        </p:spPr>
+        <p:txBody>
+          <a:bodyPr wrap="square" lIns="0" tIns="0" rIns="0" bIns="0" rtlCol="0" anchor="t"/>
+          <a:lstStyle/>
+          <a:p>
+            <a:pPr indent="0" marL="0">
+              <a:buNone/>
+            </a:pPr>
+            <a:r>
+              <a:rPr lang="en-US" sz="1700" b="1" dirty="0">
                 <a:solidFill>
                   <a:srgbClr val="0F6B5C"/>
                 </a:solidFill>
@@ -9315,38 +10490,41 @@
                 <a:ea typeface="Arial" pitchFamily="34" charset="-122"/>
                 <a:cs typeface="Arial" pitchFamily="34" charset="-120"/>
               </a:rPr>
-              <a:t>Cross-border</a:t>
-            </a:r>
-            <a:endParaRPr lang="en-US" sz="1500" dirty="0"/>
-          </a:p>
-        </p:txBody>
-      </p:sp>
-      <p:sp>
-        <p:nvSpPr>
-          <p:cNvPr id="8" name="Text 5"/>
-          <p:cNvSpPr txBox="1"/>
-          <p:nvPr/>
-        </p:nvSpPr>
-        <p:spPr>
-          <a:xfrm>
-            <a:off x="8558784" y="3438144"/>
-            <a:ext cx="3017520" cy="914400"/>
-          </a:xfrm>
-          <a:prstGeom prst="rect">
-            <a:avLst/>
-          </a:prstGeom>
-          <a:noFill/>
-          <a:ln/>
-        </p:spPr>
-        <p:txBody>
-          <a:bodyPr wrap="square" lIns="0" tIns="0" rIns="0" bIns="0" rtlCol="0" anchor="ctr"/>
-          <a:lstStyle/>
-          <a:p>
-            <a:pPr indent="0" marL="0">
-              <a:buNone/>
-            </a:pPr>
-            <a:r>
-              <a:rPr lang="en-US" sz="1250" dirty="0">
+              <a:t>Incoming call</a:t>
+            </a:r>
+            <a:endParaRPr lang="en-US" sz="1700" dirty="0"/>
+          </a:p>
+        </p:txBody>
+      </p:sp>
+      <p:sp>
+        <p:nvSpPr>
+          <p:cNvPr id="9" name="Text 7"/>
+          <p:cNvSpPr txBox="1"/>
+          <p:nvPr/>
+        </p:nvSpPr>
+        <p:spPr>
+          <a:xfrm>
+            <a:off x="877824" y="3200400"/>
+            <a:ext cx="2871216" cy="768096"/>
+          </a:xfrm>
+          <a:prstGeom prst="rect">
+            <a:avLst/>
+          </a:prstGeom>
+          <a:noFill/>
+          <a:ln/>
+        </p:spPr>
+        <p:txBody>
+          <a:bodyPr wrap="square" lIns="0" tIns="0" rIns="0" bIns="0" rtlCol="0" anchor="t"/>
+          <a:lstStyle/>
+          <a:p>
+            <a:pPr indent="0" marL="0">
+              <a:lnSpc>
+                <a:spcPts val="1500"/>
+              </a:lnSpc>
+              <a:buNone/>
+            </a:pPr>
+            <a:r>
+              <a:rPr lang="en-US" sz="1200" dirty="0">
                 <a:solidFill>
                   <a:srgbClr val="0F172A"/>
                 </a:solidFill>
@@ -9354,38 +10532,126 @@
                 <a:ea typeface="Calibri" pitchFamily="34" charset="-122"/>
                 <a:cs typeface="Calibri" pitchFamily="34" charset="-120"/>
               </a:rPr>
-              <a:t>Numbers reported from more than one market are flagged for moderators as an operation, not a dispute.</a:t>
-            </a:r>
-            <a:endParaRPr lang="en-US" sz="1250" dirty="0"/>
-          </a:p>
-        </p:txBody>
-      </p:sp>
-      <p:sp>
-        <p:nvSpPr>
-          <p:cNvPr id="9" name="Text 6"/>
-          <p:cNvSpPr txBox="1"/>
-          <p:nvPr/>
-        </p:nvSpPr>
-        <p:spPr>
-          <a:xfrm>
-            <a:off x="8558784" y="4553712"/>
-            <a:ext cx="3017520" cy="274320"/>
-          </a:xfrm>
-          <a:prstGeom prst="rect">
-            <a:avLst/>
-          </a:prstGeom>
-          <a:noFill/>
-          <a:ln/>
-        </p:spPr>
-        <p:txBody>
-          <a:bodyPr wrap="square" lIns="0" tIns="0" rIns="0" bIns="0" rtlCol="0" anchor="ctr"/>
-          <a:lstStyle/>
-          <a:p>
-            <a:pPr indent="0" marL="0">
-              <a:buNone/>
-            </a:pPr>
-            <a:r>
-              <a:rPr lang="en-US" sz="1500" b="1" dirty="0">
+              <a:t>A call-screening service resolves the caller against the shared reputation database while the phone is still ringing.</a:t>
+            </a:r>
+            <a:endParaRPr lang="en-US" sz="1200" dirty="0"/>
+          </a:p>
+        </p:txBody>
+      </p:sp>
+      <p:sp>
+        <p:nvSpPr>
+          <p:cNvPr id="10" name="Shape 8"/>
+          <p:cNvSpPr/>
+          <p:nvPr/>
+        </p:nvSpPr>
+        <p:spPr>
+          <a:xfrm>
+            <a:off x="4334256" y="2157984"/>
+            <a:ext cx="3493008" cy="2048256"/>
+          </a:xfrm>
+          <a:prstGeom prst="roundRect">
+            <a:avLst>
+              <a:gd name="adj" fmla="val 3571"/>
+            </a:avLst>
+          </a:prstGeom>
+          <a:solidFill>
+            <a:srgbClr val="F4FAF8"/>
+          </a:solidFill>
+          <a:ln/>
+          <a:effectLst>
+            <a:outerShdw sx="100000" sy="100000" kx="0" ky="0" algn="bl" rotWithShape="0" blurRad="127000" dist="25400" dir="5400000">
+              <a:srgbClr val="0F172A">
+                <a:alpha val="10000"/>
+              </a:srgbClr>
+            </a:outerShdw>
+          </a:effectLst>
+        </p:spPr>
+      </p:sp>
+      <p:sp>
+        <p:nvSpPr>
+          <p:cNvPr id="11" name="Shape 9"/>
+          <p:cNvSpPr/>
+          <p:nvPr/>
+        </p:nvSpPr>
+        <p:spPr>
+          <a:xfrm>
+            <a:off x="4645152" y="2359152"/>
+            <a:ext cx="457200" cy="457200"/>
+          </a:xfrm>
+          <a:prstGeom prst="ellipse">
+            <a:avLst/>
+          </a:prstGeom>
+          <a:solidFill>
+            <a:srgbClr val="0F6B5C"/>
+          </a:solidFill>
+          <a:ln/>
+        </p:spPr>
+      </p:sp>
+      <p:sp>
+        <p:nvSpPr>
+          <p:cNvPr id="12" name="Text 10"/>
+          <p:cNvSpPr txBox="1"/>
+          <p:nvPr/>
+        </p:nvSpPr>
+        <p:spPr>
+          <a:xfrm>
+            <a:off x="4645152" y="2359152"/>
+            <a:ext cx="457200" cy="457200"/>
+          </a:xfrm>
+          <a:prstGeom prst="rect">
+            <a:avLst/>
+          </a:prstGeom>
+          <a:noFill/>
+          <a:ln/>
+        </p:spPr>
+        <p:txBody>
+          <a:bodyPr wrap="square" lIns="0" tIns="0" rIns="0" bIns="0" rtlCol="0" anchor="ctr"/>
+          <a:lstStyle/>
+          <a:p>
+            <a:pPr algn="ctr" indent="0" marL="0">
+              <a:buNone/>
+            </a:pPr>
+            <a:r>
+              <a:rPr lang="en-US" sz="1400" b="1" dirty="0">
+                <a:solidFill>
+                  <a:srgbClr val="FFFFFF"/>
+                </a:solidFill>
+                <a:latin typeface="Arial" pitchFamily="34" charset="0"/>
+                <a:ea typeface="Arial" pitchFamily="34" charset="-122"/>
+                <a:cs typeface="Arial" pitchFamily="34" charset="-120"/>
+              </a:rPr>
+              <a:t>2</a:t>
+            </a:r>
+            <a:endParaRPr lang="en-US" sz="1400" dirty="0"/>
+          </a:p>
+        </p:txBody>
+      </p:sp>
+      <p:sp>
+        <p:nvSpPr>
+          <p:cNvPr id="13" name="Text 11"/>
+          <p:cNvSpPr txBox="1"/>
+          <p:nvPr/>
+        </p:nvSpPr>
+        <p:spPr>
+          <a:xfrm>
+            <a:off x="4645152" y="2889504"/>
+            <a:ext cx="2871216" cy="274320"/>
+          </a:xfrm>
+          <a:prstGeom prst="rect">
+            <a:avLst/>
+          </a:prstGeom>
+          <a:noFill/>
+          <a:ln/>
+        </p:spPr>
+        <p:txBody>
+          <a:bodyPr wrap="square" lIns="0" tIns="0" rIns="0" bIns="0" rtlCol="0" anchor="t"/>
+          <a:lstStyle/>
+          <a:p>
+            <a:pPr indent="0" marL="0">
+              <a:buNone/>
+            </a:pPr>
+            <a:r>
+              <a:rPr lang="en-US" sz="1700" b="1" dirty="0">
                 <a:solidFill>
                   <a:srgbClr val="0F6B5C"/>
                 </a:solidFill>
@@ -9393,38 +10659,41 @@
                 <a:ea typeface="Arial" pitchFamily="34" charset="-122"/>
                 <a:cs typeface="Arial" pitchFamily="34" charset="-120"/>
               </a:rPr>
-              <a:t>Stated method</a:t>
-            </a:r>
-            <a:endParaRPr lang="en-US" sz="1500" dirty="0"/>
-          </a:p>
-        </p:txBody>
-      </p:sp>
-      <p:sp>
-        <p:nvSpPr>
-          <p:cNvPr id="10" name="Text 7"/>
-          <p:cNvSpPr txBox="1"/>
-          <p:nvPr/>
-        </p:nvSpPr>
-        <p:spPr>
-          <a:xfrm>
-            <a:off x="8558784" y="4864608"/>
-            <a:ext cx="3017520" cy="914400"/>
-          </a:xfrm>
-          <a:prstGeom prst="rect">
-            <a:avLst/>
-          </a:prstGeom>
-          <a:noFill/>
-          <a:ln/>
-        </p:spPr>
-        <p:txBody>
-          <a:bodyPr wrap="square" lIns="0" tIns="0" rIns="0" bIns="0" rtlCol="0" anchor="ctr"/>
-          <a:lstStyle/>
-          <a:p>
-            <a:pPr indent="0" marL="0">
-              <a:buNone/>
-            </a:pPr>
-            <a:r>
-              <a:rPr lang="en-US" sz="1250" dirty="0">
+              <a:t>SMS</a:t>
+            </a:r>
+            <a:endParaRPr lang="en-US" sz="1700" dirty="0"/>
+          </a:p>
+        </p:txBody>
+      </p:sp>
+      <p:sp>
+        <p:nvSpPr>
+          <p:cNvPr id="14" name="Text 12"/>
+          <p:cNvSpPr txBox="1"/>
+          <p:nvPr/>
+        </p:nvSpPr>
+        <p:spPr>
+          <a:xfrm>
+            <a:off x="4645152" y="3200400"/>
+            <a:ext cx="2871216" cy="768096"/>
+          </a:xfrm>
+          <a:prstGeom prst="rect">
+            <a:avLst/>
+          </a:prstGeom>
+          <a:noFill/>
+          <a:ln/>
+        </p:spPr>
+        <p:txBody>
+          <a:bodyPr wrap="square" lIns="0" tIns="0" rIns="0" bIns="0" rtlCol="0" anchor="t"/>
+          <a:lstStyle/>
+          <a:p>
+            <a:pPr indent="0" marL="0">
+              <a:lnSpc>
+                <a:spcPts val="1500"/>
+              </a:lnSpc>
+              <a:buNone/>
+            </a:pPr>
+            <a:r>
+              <a:rPr lang="en-US" sz="1200" dirty="0">
                 <a:solidFill>
                   <a:srgbClr val="0F172A"/>
                 </a:solidFill>
@@ -9432,48 +10701,460 @@
                 <a:ea typeface="Calibri" pitchFamily="34" charset="-122"/>
                 <a:cs typeface="Calibri" pitchFamily="34" charset="-120"/>
               </a:rPr>
-              <a:t>The feed carries a method_note saying it is weighted rules, not a model — shown in the UI verbatim.</a:t>
-            </a:r>
-            <a:endParaRPr lang="en-US" sz="1250" dirty="0"/>
-          </a:p>
-        </p:txBody>
-      </p:sp>
-      <p:sp>
-        <p:nvSpPr>
-          <p:cNvPr id="11" name="Text 8"/>
-          <p:cNvSpPr txBox="1"/>
-          <p:nvPr/>
-        </p:nvSpPr>
-        <p:spPr>
-          <a:xfrm>
-            <a:off x="566928" y="5925312"/>
-            <a:ext cx="7772400" cy="256032"/>
-          </a:xfrm>
-          <a:prstGeom prst="rect">
-            <a:avLst/>
-          </a:prstGeom>
-          <a:noFill/>
-          <a:ln/>
-        </p:spPr>
-        <p:txBody>
-          <a:bodyPr wrap="square" lIns="0" tIns="0" rIns="0" bIns="0" rtlCol="0" anchor="ctr"/>
-          <a:lstStyle/>
-          <a:p>
-            <a:pPr indent="0" marL="0">
-              <a:buNone/>
-            </a:pPr>
-            <a:r>
-              <a:rPr lang="en-US" sz="1100" i="1" dirty="0">
-                <a:solidFill>
-                  <a:srgbClr val="64748B"/>
+              <a:t>Sender looked up and the body classified — two independent signals, since a new number has no reputation but still sends the known script.</a:t>
+            </a:r>
+            <a:endParaRPr lang="en-US" sz="1200" dirty="0"/>
+          </a:p>
+        </p:txBody>
+      </p:sp>
+      <p:sp>
+        <p:nvSpPr>
+          <p:cNvPr id="15" name="Shape 13"/>
+          <p:cNvSpPr/>
+          <p:nvPr/>
+        </p:nvSpPr>
+        <p:spPr>
+          <a:xfrm>
+            <a:off x="8101584" y="2157984"/>
+            <a:ext cx="3493008" cy="2048256"/>
+          </a:xfrm>
+          <a:prstGeom prst="roundRect">
+            <a:avLst>
+              <a:gd name="adj" fmla="val 3571"/>
+            </a:avLst>
+          </a:prstGeom>
+          <a:solidFill>
+            <a:srgbClr val="F4FAF8"/>
+          </a:solidFill>
+          <a:ln/>
+          <a:effectLst>
+            <a:outerShdw sx="100000" sy="100000" kx="0" ky="0" algn="bl" rotWithShape="0" blurRad="127000" dist="25400" dir="5400000">
+              <a:srgbClr val="0F172A">
+                <a:alpha val="10000"/>
+              </a:srgbClr>
+            </a:outerShdw>
+          </a:effectLst>
+        </p:spPr>
+      </p:sp>
+      <p:sp>
+        <p:nvSpPr>
+          <p:cNvPr id="16" name="Shape 14"/>
+          <p:cNvSpPr/>
+          <p:nvPr/>
+        </p:nvSpPr>
+        <p:spPr>
+          <a:xfrm>
+            <a:off x="8412480" y="2359152"/>
+            <a:ext cx="457200" cy="457200"/>
+          </a:xfrm>
+          <a:prstGeom prst="ellipse">
+            <a:avLst/>
+          </a:prstGeom>
+          <a:solidFill>
+            <a:srgbClr val="0F6B5C"/>
+          </a:solidFill>
+          <a:ln/>
+        </p:spPr>
+      </p:sp>
+      <p:sp>
+        <p:nvSpPr>
+          <p:cNvPr id="17" name="Text 15"/>
+          <p:cNvSpPr txBox="1"/>
+          <p:nvPr/>
+        </p:nvSpPr>
+        <p:spPr>
+          <a:xfrm>
+            <a:off x="8412480" y="2359152"/>
+            <a:ext cx="457200" cy="457200"/>
+          </a:xfrm>
+          <a:prstGeom prst="rect">
+            <a:avLst/>
+          </a:prstGeom>
+          <a:noFill/>
+          <a:ln/>
+        </p:spPr>
+        <p:txBody>
+          <a:bodyPr wrap="square" lIns="0" tIns="0" rIns="0" bIns="0" rtlCol="0" anchor="ctr"/>
+          <a:lstStyle/>
+          <a:p>
+            <a:pPr algn="ctr" indent="0" marL="0">
+              <a:buNone/>
+            </a:pPr>
+            <a:r>
+              <a:rPr lang="en-US" sz="1400" b="1" dirty="0">
+                <a:solidFill>
+                  <a:srgbClr val="FFFFFF"/>
+                </a:solidFill>
+                <a:latin typeface="Arial" pitchFamily="34" charset="0"/>
+                <a:ea typeface="Arial" pitchFamily="34" charset="-122"/>
+                <a:cs typeface="Arial" pitchFamily="34" charset="-120"/>
+              </a:rPr>
+              <a:t>3</a:t>
+            </a:r>
+            <a:endParaRPr lang="en-US" sz="1400" dirty="0"/>
+          </a:p>
+        </p:txBody>
+      </p:sp>
+      <p:sp>
+        <p:nvSpPr>
+          <p:cNvPr id="18" name="Text 16"/>
+          <p:cNvSpPr txBox="1"/>
+          <p:nvPr/>
+        </p:nvSpPr>
+        <p:spPr>
+          <a:xfrm>
+            <a:off x="8412480" y="2889504"/>
+            <a:ext cx="2871216" cy="274320"/>
+          </a:xfrm>
+          <a:prstGeom prst="rect">
+            <a:avLst/>
+          </a:prstGeom>
+          <a:noFill/>
+          <a:ln/>
+        </p:spPr>
+        <p:txBody>
+          <a:bodyPr wrap="square" lIns="0" tIns="0" rIns="0" bIns="0" rtlCol="0" anchor="t"/>
+          <a:lstStyle/>
+          <a:p>
+            <a:pPr indent="0" marL="0">
+              <a:buNone/>
+            </a:pPr>
+            <a:r>
+              <a:rPr lang="en-US" sz="1700" b="1" dirty="0">
+                <a:solidFill>
+                  <a:srgbClr val="0F6B5C"/>
+                </a:solidFill>
+                <a:latin typeface="Arial" pitchFamily="34" charset="0"/>
+                <a:ea typeface="Arial" pitchFamily="34" charset="-122"/>
+                <a:cs typeface="Arial" pitchFamily="34" charset="-120"/>
+              </a:rPr>
+              <a:t>WhatsApp call</a:t>
+            </a:r>
+            <a:endParaRPr lang="en-US" sz="1700" dirty="0"/>
+          </a:p>
+        </p:txBody>
+      </p:sp>
+      <p:sp>
+        <p:nvSpPr>
+          <p:cNvPr id="19" name="Text 17"/>
+          <p:cNvSpPr txBox="1"/>
+          <p:nvPr/>
+        </p:nvSpPr>
+        <p:spPr>
+          <a:xfrm>
+            <a:off x="8412480" y="3200400"/>
+            <a:ext cx="2871216" cy="768096"/>
+          </a:xfrm>
+          <a:prstGeom prst="rect">
+            <a:avLst/>
+          </a:prstGeom>
+          <a:noFill/>
+          <a:ln/>
+        </p:spPr>
+        <p:txBody>
+          <a:bodyPr wrap="square" lIns="0" tIns="0" rIns="0" bIns="0" rtlCol="0" anchor="t"/>
+          <a:lstStyle/>
+          <a:p>
+            <a:pPr indent="0" marL="0">
+              <a:lnSpc>
+                <a:spcPts val="1500"/>
+              </a:lnSpc>
+              <a:buNone/>
+            </a:pPr>
+            <a:r>
+              <a:rPr lang="en-US" sz="1200" dirty="0">
+                <a:solidFill>
+                  <a:srgbClr val="0F172A"/>
                 </a:solidFill>
                 <a:latin typeface="Calibri" pitchFamily="34" charset="0"/>
                 <a:ea typeface="Calibri" pitchFamily="34" charset="-122"/>
                 <a:cs typeface="Calibri" pitchFamily="34" charset="-120"/>
               </a:rPr>
-              <a:t>Moderation dashboard · captured against a running backend</a:t>
-            </a:r>
-            <a:endParaRPr lang="en-US" sz="1100" dirty="0"/>
+              <a:t>A notification listener catches VoIP calls that never reach the dialler — increasingly where the traffic actually is.</a:t>
+            </a:r>
+            <a:endParaRPr lang="en-US" sz="1200" dirty="0"/>
+          </a:p>
+        </p:txBody>
+      </p:sp>
+      <p:sp>
+        <p:nvSpPr>
+          <p:cNvPr id="20" name="Text 18"/>
+          <p:cNvSpPr txBox="1"/>
+          <p:nvPr/>
+        </p:nvSpPr>
+        <p:spPr>
+          <a:xfrm>
+            <a:off x="566928" y="4407408"/>
+            <a:ext cx="3493008" cy="274320"/>
+          </a:xfrm>
+          <a:prstGeom prst="rect">
+            <a:avLst/>
+          </a:prstGeom>
+          <a:noFill/>
+          <a:ln/>
+        </p:spPr>
+        <p:txBody>
+          <a:bodyPr wrap="square" lIns="0" tIns="0" rIns="0" bIns="0" rtlCol="0" anchor="t"/>
+          <a:lstStyle/>
+          <a:p>
+            <a:pPr indent="0" marL="0">
+              <a:buNone/>
+            </a:pPr>
+            <a:r>
+              <a:rPr lang="en-US" sz="1400" b="1" dirty="0">
+                <a:solidFill>
+                  <a:srgbClr val="0F6B5C"/>
+                </a:solidFill>
+                <a:latin typeface="Arial" pitchFamily="34" charset="0"/>
+                <a:ea typeface="Arial" pitchFamily="34" charset="-122"/>
+                <a:cs typeface="Arial" pitchFamily="34" charset="-120"/>
+              </a:rPr>
+              <a:t>Works with the app closed</a:t>
+            </a:r>
+            <a:endParaRPr lang="en-US" sz="1400" dirty="0"/>
+          </a:p>
+        </p:txBody>
+      </p:sp>
+      <p:sp>
+        <p:nvSpPr>
+          <p:cNvPr id="21" name="Text 19"/>
+          <p:cNvSpPr txBox="1"/>
+          <p:nvPr/>
+        </p:nvSpPr>
+        <p:spPr>
+          <a:xfrm>
+            <a:off x="566928" y="4718304"/>
+            <a:ext cx="3493008" cy="1188720"/>
+          </a:xfrm>
+          <a:prstGeom prst="rect">
+            <a:avLst/>
+          </a:prstGeom>
+          <a:noFill/>
+          <a:ln/>
+        </p:spPr>
+        <p:txBody>
+          <a:bodyPr wrap="square" lIns="0" tIns="0" rIns="0" bIns="0" rtlCol="0" anchor="t"/>
+          <a:lstStyle/>
+          <a:p>
+            <a:pPr indent="0" marL="0">
+              <a:lnSpc>
+                <a:spcPts val="1550"/>
+              </a:lnSpc>
+              <a:buNone/>
+            </a:pPr>
+            <a:r>
+              <a:rPr lang="en-US" sz="1200" dirty="0">
+                <a:solidFill>
+                  <a:srgbClr val="0F172A"/>
+                </a:solidFill>
+                <a:latin typeface="Calibri" pitchFamily="34" charset="0"/>
+                <a:ea typeface="Calibri" pitchFamily="34" charset="-122"/>
+                <a:cs typeface="Calibri" pitchFamily="34" charset="-120"/>
+              </a:rPr>
+              <a:t>The pipeline is native Kotlin, not Flutter — a call can arrive when the engine was never started since boot. A warning that only fires while the app happens to be open is not protection.</a:t>
+            </a:r>
+            <a:endParaRPr lang="en-US" sz="1200" dirty="0"/>
+          </a:p>
+        </p:txBody>
+      </p:sp>
+      <p:sp>
+        <p:nvSpPr>
+          <p:cNvPr id="22" name="Text 20"/>
+          <p:cNvSpPr txBox="1"/>
+          <p:nvPr/>
+        </p:nvSpPr>
+        <p:spPr>
+          <a:xfrm>
+            <a:off x="4334256" y="4407408"/>
+            <a:ext cx="3493008" cy="274320"/>
+          </a:xfrm>
+          <a:prstGeom prst="rect">
+            <a:avLst/>
+          </a:prstGeom>
+          <a:noFill/>
+          <a:ln/>
+        </p:spPr>
+        <p:txBody>
+          <a:bodyPr wrap="square" lIns="0" tIns="0" rIns="0" bIns="0" rtlCol="0" anchor="t"/>
+          <a:lstStyle/>
+          <a:p>
+            <a:pPr indent="0" marL="0">
+              <a:buNone/>
+            </a:pPr>
+            <a:r>
+              <a:rPr lang="en-US" sz="1400" b="1" dirty="0">
+                <a:solidFill>
+                  <a:srgbClr val="0F6B5C"/>
+                </a:solidFill>
+                <a:latin typeface="Arial" pitchFamily="34" charset="0"/>
+                <a:ea typeface="Arial" pitchFamily="34" charset="-122"/>
+                <a:cs typeface="Arial" pitchFamily="34" charset="-120"/>
+              </a:rPr>
+              <a:t>One pipeline, one threshold</a:t>
+            </a:r>
+            <a:endParaRPr lang="en-US" sz="1400" dirty="0"/>
+          </a:p>
+        </p:txBody>
+      </p:sp>
+      <p:sp>
+        <p:nvSpPr>
+          <p:cNvPr id="23" name="Text 21"/>
+          <p:cNvSpPr txBox="1"/>
+          <p:nvPr/>
+        </p:nvSpPr>
+        <p:spPr>
+          <a:xfrm>
+            <a:off x="4334256" y="4718304"/>
+            <a:ext cx="3493008" cy="1188720"/>
+          </a:xfrm>
+          <a:prstGeom prst="rect">
+            <a:avLst/>
+          </a:prstGeom>
+          <a:noFill/>
+          <a:ln/>
+        </p:spPr>
+        <p:txBody>
+          <a:bodyPr wrap="square" lIns="0" tIns="0" rIns="0" bIns="0" rtlCol="0" anchor="t"/>
+          <a:lstStyle/>
+          <a:p>
+            <a:pPr indent="0" marL="0">
+              <a:lnSpc>
+                <a:spcPts val="1550"/>
+              </a:lnSpc>
+              <a:buNone/>
+            </a:pPr>
+            <a:r>
+              <a:rPr lang="en-US" sz="1200" dirty="0">
+                <a:solidFill>
+                  <a:srgbClr val="0F172A"/>
+                </a:solidFill>
+                <a:latin typeface="Calibri" pitchFamily="34" charset="0"/>
+                <a:ea typeface="Calibri" pitchFamily="34" charset="-122"/>
+                <a:cs typeface="Calibri" pitchFamily="34" charset="-120"/>
+              </a:rPr>
+              <a:t>All three channels converge on the same lookup and the same warning bar, and the in-app test button drives that exact path rather than a parallel one.</a:t>
+            </a:r>
+            <a:endParaRPr lang="en-US" sz="1200" dirty="0"/>
+          </a:p>
+        </p:txBody>
+      </p:sp>
+      <p:sp>
+        <p:nvSpPr>
+          <p:cNvPr id="24" name="Text 22"/>
+          <p:cNvSpPr txBox="1"/>
+          <p:nvPr/>
+        </p:nvSpPr>
+        <p:spPr>
+          <a:xfrm>
+            <a:off x="8101584" y="4407408"/>
+            <a:ext cx="3493008" cy="274320"/>
+          </a:xfrm>
+          <a:prstGeom prst="rect">
+            <a:avLst/>
+          </a:prstGeom>
+          <a:noFill/>
+          <a:ln/>
+        </p:spPr>
+        <p:txBody>
+          <a:bodyPr wrap="square" lIns="0" tIns="0" rIns="0" bIns="0" rtlCol="0" anchor="t"/>
+          <a:lstStyle/>
+          <a:p>
+            <a:pPr indent="0" marL="0">
+              <a:buNone/>
+            </a:pPr>
+            <a:r>
+              <a:rPr lang="en-US" sz="1400" b="1" dirty="0">
+                <a:solidFill>
+                  <a:srgbClr val="0F6B5C"/>
+                </a:solidFill>
+                <a:latin typeface="Arial" pitchFamily="34" charset="0"/>
+                <a:ea typeface="Arial" pitchFamily="34" charset="-122"/>
+                <a:cs typeface="Arial" pitchFamily="34" charset="-120"/>
+              </a:rPr>
+              <a:t>Android only, and we say why</a:t>
+            </a:r>
+            <a:endParaRPr lang="en-US" sz="1400" dirty="0"/>
+          </a:p>
+        </p:txBody>
+      </p:sp>
+      <p:sp>
+        <p:nvSpPr>
+          <p:cNvPr id="25" name="Text 23"/>
+          <p:cNvSpPr txBox="1"/>
+          <p:nvPr/>
+        </p:nvSpPr>
+        <p:spPr>
+          <a:xfrm>
+            <a:off x="8101584" y="4718304"/>
+            <a:ext cx="3493008" cy="1188720"/>
+          </a:xfrm>
+          <a:prstGeom prst="rect">
+            <a:avLst/>
+          </a:prstGeom>
+          <a:noFill/>
+          <a:ln/>
+        </p:spPr>
+        <p:txBody>
+          <a:bodyPr wrap="square" lIns="0" tIns="0" rIns="0" bIns="0" rtlCol="0" anchor="t"/>
+          <a:lstStyle/>
+          <a:p>
+            <a:pPr indent="0" marL="0">
+              <a:lnSpc>
+                <a:spcPts val="1550"/>
+              </a:lnSpc>
+              <a:buNone/>
+            </a:pPr>
+            <a:r>
+              <a:rPr lang="en-US" sz="1200" dirty="0">
+                <a:solidFill>
+                  <a:srgbClr val="0F172A"/>
+                </a:solidFill>
+                <a:latin typeface="Calibri" pitchFamily="34" charset="0"/>
+                <a:ea typeface="Calibri" pitchFamily="34" charset="-122"/>
+                <a:cs typeface="Calibri" pitchFamily="34" charset="-120"/>
+              </a:rPr>
+              <a:t>iOS forbids a live lookup on an incoming number; the nearest equivalent uploads a static blocklist in advance. That is a different feature, so we state the gap instead of shipping a weaker port.</a:t>
+            </a:r>
+            <a:endParaRPr lang="en-US" sz="1200" dirty="0"/>
+          </a:p>
+        </p:txBody>
+      </p:sp>
+      <p:sp>
+        <p:nvSpPr>
+          <p:cNvPr id="26" name="Text 24"/>
+          <p:cNvSpPr txBox="1"/>
+          <p:nvPr/>
+        </p:nvSpPr>
+        <p:spPr>
+          <a:xfrm>
+            <a:off x="566928" y="5943600"/>
+            <a:ext cx="11027664" cy="365760"/>
+          </a:xfrm>
+          <a:prstGeom prst="rect">
+            <a:avLst/>
+          </a:prstGeom>
+          <a:noFill/>
+          <a:ln/>
+        </p:spPr>
+        <p:txBody>
+          <a:bodyPr wrap="square" lIns="0" tIns="0" rIns="0" bIns="0" rtlCol="0" anchor="ctr"/>
+          <a:lstStyle/>
+          <a:p>
+            <a:pPr indent="0" marL="0">
+              <a:buNone/>
+            </a:pPr>
+            <a:r>
+              <a:rPr lang="en-US" sz="1350" i="1" dirty="0">
+                <a:solidFill>
+                  <a:srgbClr val="0F6B5C"/>
+                </a:solidFill>
+                <a:latin typeface="Calibri" pitchFamily="34" charset="0"/>
+                <a:ea typeface="Calibri" pitchFamily="34" charset="-122"/>
+                <a:cs typeface="Calibri" pitchFamily="34" charset="-120"/>
+              </a:rPr>
+              <a:t>Same database, same verdict — reaching the user through the channel the scam actually arrives on.</a:t>
+            </a:r>
+            <a:endParaRPr lang="en-US" sz="1350" dirty="0"/>
           </a:p>
         </p:txBody>
       </p:sp>
@@ -9488,6 +11169,412 @@
 <file path=ppt/slides/slide7.xml><?xml version="1.0" encoding="utf-8"?>
 <p:sld xmlns:a="http://schemas.openxmlformats.org/drawingml/2006/main" xmlns:r="http://schemas.openxmlformats.org/officeDocument/2006/relationships" xmlns:p="http://schemas.openxmlformats.org/presentationml/2006/main">
   <p:cSld name="Slide 7">
+    <p:bg>
+      <p:bgPr>
+        <a:solidFill>
+          <a:srgbClr val="FFFFFF"/>
+        </a:solidFill>
+      </p:bgPr>
+    </p:bg>
+    <p:spTree>
+      <p:nvGrpSpPr>
+        <p:cNvPr id="1" name=""/>
+        <p:cNvGrpSpPr/>
+        <p:nvPr/>
+      </p:nvGrpSpPr>
+      <p:grpSpPr>
+        <a:xfrm>
+          <a:off x="0" y="0"/>
+          <a:ext cx="0" cy="0"/>
+          <a:chOff x="0" y="0"/>
+          <a:chExt cx="0" cy="0"/>
+        </a:xfrm>
+      </p:grpSpPr>
+      <p:sp>
+        <p:nvSpPr>
+          <p:cNvPr id="2" name="Text 0"/>
+          <p:cNvSpPr txBox="1"/>
+          <p:nvPr/>
+        </p:nvSpPr>
+        <p:spPr>
+          <a:xfrm>
+            <a:off x="566928" y="457200"/>
+            <a:ext cx="11027664" cy="256032"/>
+          </a:xfrm>
+          <a:prstGeom prst="rect">
+            <a:avLst/>
+          </a:prstGeom>
+          <a:noFill/>
+          <a:ln/>
+        </p:spPr>
+        <p:txBody>
+          <a:bodyPr wrap="square" lIns="0" tIns="0" rIns="0" bIns="0" rtlCol="0" anchor="ctr"/>
+          <a:lstStyle/>
+          <a:p>
+            <a:pPr indent="0" marL="0">
+              <a:buNone/>
+            </a:pPr>
+            <a:r>
+              <a:rPr lang="en-US" sz="1200" b="1" spc="140" kern="0" dirty="0">
+                <a:solidFill>
+                  <a:srgbClr val="14A085"/>
+                </a:solidFill>
+                <a:latin typeface="Arial" pitchFamily="34" charset="0"/>
+                <a:ea typeface="Arial" pitchFamily="34" charset="-122"/>
+                <a:cs typeface="Arial" pitchFamily="34" charset="-120"/>
+              </a:rPr>
+              <a:t>IT RUNS</a:t>
+            </a:r>
+            <a:endParaRPr lang="en-US" sz="1200" dirty="0"/>
+          </a:p>
+        </p:txBody>
+      </p:sp>
+      <p:sp>
+        <p:nvSpPr>
+          <p:cNvPr id="3" name="Text 1"/>
+          <p:cNvSpPr txBox="1"/>
+          <p:nvPr/>
+        </p:nvSpPr>
+        <p:spPr>
+          <a:xfrm>
+            <a:off x="566928" y="749808"/>
+            <a:ext cx="11027664" cy="914400"/>
+          </a:xfrm>
+          <a:prstGeom prst="rect">
+            <a:avLst/>
+          </a:prstGeom>
+          <a:noFill/>
+          <a:ln/>
+        </p:spPr>
+        <p:txBody>
+          <a:bodyPr wrap="square" lIns="0" tIns="0" rIns="0" bIns="0" rtlCol="0" anchor="ctr"/>
+          <a:lstStyle/>
+          <a:p>
+            <a:pPr indent="0" marL="0">
+              <a:buNone/>
+            </a:pPr>
+            <a:r>
+              <a:rPr lang="en-US" sz="3200" b="1" dirty="0">
+                <a:solidFill>
+                  <a:srgbClr val="0F172A"/>
+                </a:solidFill>
+                <a:latin typeface="Arial" pitchFamily="34" charset="0"/>
+                <a:ea typeface="Arial" pitchFamily="34" charset="-122"/>
+                <a:cs typeface="Arial" pitchFamily="34" charset="-120"/>
+              </a:rPr>
+              <a:t>Not slideware — this is the running product.</a:t>
+            </a:r>
+            <a:endParaRPr lang="en-US" sz="3200" dirty="0"/>
+          </a:p>
+        </p:txBody>
+      </p:sp>
+      <p:pic>
+        <p:nvPicPr>
+          <p:cNvPr id="4" name="Image 0" descr="/home/user/ChengetAi/docs/screenshots/admin-overview.png">    </p:cNvPr>
+          <p:cNvPicPr>
+            <a:picLocks noChangeAspect="1"/>
+          </p:cNvPicPr>
+          <p:nvPr/>
+        </p:nvPicPr>
+        <p:blipFill>
+          <a:blip r:embed="rId1"/>
+          <a:srcRect l="0" r="0" t="0" b="0"/>
+          <a:stretch/>
+        </p:blipFill>
+        <p:spPr>
+          <a:xfrm>
+            <a:off x="566928" y="1572768"/>
+            <a:ext cx="7772400" cy="4224528"/>
+          </a:xfrm>
+          <a:prstGeom prst="rect">
+            <a:avLst/>
+          </a:prstGeom>
+        </p:spPr>
+      </p:pic>
+      <p:sp>
+        <p:nvSpPr>
+          <p:cNvPr id="5" name="Text 2"/>
+          <p:cNvSpPr txBox="1"/>
+          <p:nvPr/>
+        </p:nvSpPr>
+        <p:spPr>
+          <a:xfrm>
+            <a:off x="8558784" y="1700784"/>
+            <a:ext cx="3017520" cy="274320"/>
+          </a:xfrm>
+          <a:prstGeom prst="rect">
+            <a:avLst/>
+          </a:prstGeom>
+          <a:noFill/>
+          <a:ln/>
+        </p:spPr>
+        <p:txBody>
+          <a:bodyPr wrap="square" lIns="0" tIns="0" rIns="0" bIns="0" rtlCol="0" anchor="ctr"/>
+          <a:lstStyle/>
+          <a:p>
+            <a:pPr indent="0" marL="0">
+              <a:buNone/>
+            </a:pPr>
+            <a:r>
+              <a:rPr lang="en-US" sz="1500" b="1" dirty="0">
+                <a:solidFill>
+                  <a:srgbClr val="0F6B5C"/>
+                </a:solidFill>
+                <a:latin typeface="Arial" pitchFamily="34" charset="0"/>
+                <a:ea typeface="Arial" pitchFamily="34" charset="-122"/>
+                <a:cs typeface="Arial" pitchFamily="34" charset="-120"/>
+              </a:rPr>
+              <a:t>Live data</a:t>
+            </a:r>
+            <a:endParaRPr lang="en-US" sz="1500" dirty="0"/>
+          </a:p>
+        </p:txBody>
+      </p:sp>
+      <p:sp>
+        <p:nvSpPr>
+          <p:cNvPr id="6" name="Text 3"/>
+          <p:cNvSpPr txBox="1"/>
+          <p:nvPr/>
+        </p:nvSpPr>
+        <p:spPr>
+          <a:xfrm>
+            <a:off x="8558784" y="2011680"/>
+            <a:ext cx="3017520" cy="914400"/>
+          </a:xfrm>
+          <a:prstGeom prst="rect">
+            <a:avLst/>
+          </a:prstGeom>
+          <a:noFill/>
+          <a:ln/>
+        </p:spPr>
+        <p:txBody>
+          <a:bodyPr wrap="square" lIns="0" tIns="0" rIns="0" bIns="0" rtlCol="0" anchor="ctr"/>
+          <a:lstStyle/>
+          <a:p>
+            <a:pPr indent="0" marL="0">
+              <a:buNone/>
+            </a:pPr>
+            <a:r>
+              <a:rPr lang="en-US" sz="1250" dirty="0">
+                <a:solidFill>
+                  <a:srgbClr val="0F172A"/>
+                </a:solidFill>
+                <a:latin typeface="Calibri" pitchFamily="34" charset="0"/>
+                <a:ea typeface="Calibri" pitchFamily="34" charset="-122"/>
+                <a:cs typeface="Calibri" pitchFamily="34" charset="-120"/>
+              </a:rPr>
+              <a:t>Trending categories and the country hotspot map are computed from the reports table on every request.</a:t>
+            </a:r>
+            <a:endParaRPr lang="en-US" sz="1250" dirty="0"/>
+          </a:p>
+        </p:txBody>
+      </p:sp>
+      <p:sp>
+        <p:nvSpPr>
+          <p:cNvPr id="7" name="Text 4"/>
+          <p:cNvSpPr txBox="1"/>
+          <p:nvPr/>
+        </p:nvSpPr>
+        <p:spPr>
+          <a:xfrm>
+            <a:off x="8558784" y="3127248"/>
+            <a:ext cx="3017520" cy="274320"/>
+          </a:xfrm>
+          <a:prstGeom prst="rect">
+            <a:avLst/>
+          </a:prstGeom>
+          <a:noFill/>
+          <a:ln/>
+        </p:spPr>
+        <p:txBody>
+          <a:bodyPr wrap="square" lIns="0" tIns="0" rIns="0" bIns="0" rtlCol="0" anchor="ctr"/>
+          <a:lstStyle/>
+          <a:p>
+            <a:pPr indent="0" marL="0">
+              <a:buNone/>
+            </a:pPr>
+            <a:r>
+              <a:rPr lang="en-US" sz="1500" b="1" dirty="0">
+                <a:solidFill>
+                  <a:srgbClr val="0F6B5C"/>
+                </a:solidFill>
+                <a:latin typeface="Arial" pitchFamily="34" charset="0"/>
+                <a:ea typeface="Arial" pitchFamily="34" charset="-122"/>
+                <a:cs typeface="Arial" pitchFamily="34" charset="-120"/>
+              </a:rPr>
+              <a:t>Cross-border</a:t>
+            </a:r>
+            <a:endParaRPr lang="en-US" sz="1500" dirty="0"/>
+          </a:p>
+        </p:txBody>
+      </p:sp>
+      <p:sp>
+        <p:nvSpPr>
+          <p:cNvPr id="8" name="Text 5"/>
+          <p:cNvSpPr txBox="1"/>
+          <p:nvPr/>
+        </p:nvSpPr>
+        <p:spPr>
+          <a:xfrm>
+            <a:off x="8558784" y="3438144"/>
+            <a:ext cx="3017520" cy="914400"/>
+          </a:xfrm>
+          <a:prstGeom prst="rect">
+            <a:avLst/>
+          </a:prstGeom>
+          <a:noFill/>
+          <a:ln/>
+        </p:spPr>
+        <p:txBody>
+          <a:bodyPr wrap="square" lIns="0" tIns="0" rIns="0" bIns="0" rtlCol="0" anchor="ctr"/>
+          <a:lstStyle/>
+          <a:p>
+            <a:pPr indent="0" marL="0">
+              <a:buNone/>
+            </a:pPr>
+            <a:r>
+              <a:rPr lang="en-US" sz="1250" dirty="0">
+                <a:solidFill>
+                  <a:srgbClr val="0F172A"/>
+                </a:solidFill>
+                <a:latin typeface="Calibri" pitchFamily="34" charset="0"/>
+                <a:ea typeface="Calibri" pitchFamily="34" charset="-122"/>
+                <a:cs typeface="Calibri" pitchFamily="34" charset="-120"/>
+              </a:rPr>
+              <a:t>Numbers reported from more than one market are flagged for moderators as an operation, not a dispute.</a:t>
+            </a:r>
+            <a:endParaRPr lang="en-US" sz="1250" dirty="0"/>
+          </a:p>
+        </p:txBody>
+      </p:sp>
+      <p:sp>
+        <p:nvSpPr>
+          <p:cNvPr id="9" name="Text 6"/>
+          <p:cNvSpPr txBox="1"/>
+          <p:nvPr/>
+        </p:nvSpPr>
+        <p:spPr>
+          <a:xfrm>
+            <a:off x="8558784" y="4553712"/>
+            <a:ext cx="3017520" cy="274320"/>
+          </a:xfrm>
+          <a:prstGeom prst="rect">
+            <a:avLst/>
+          </a:prstGeom>
+          <a:noFill/>
+          <a:ln/>
+        </p:spPr>
+        <p:txBody>
+          <a:bodyPr wrap="square" lIns="0" tIns="0" rIns="0" bIns="0" rtlCol="0" anchor="ctr"/>
+          <a:lstStyle/>
+          <a:p>
+            <a:pPr indent="0" marL="0">
+              <a:buNone/>
+            </a:pPr>
+            <a:r>
+              <a:rPr lang="en-US" sz="1500" b="1" dirty="0">
+                <a:solidFill>
+                  <a:srgbClr val="0F6B5C"/>
+                </a:solidFill>
+                <a:latin typeface="Arial" pitchFamily="34" charset="0"/>
+                <a:ea typeface="Arial" pitchFamily="34" charset="-122"/>
+                <a:cs typeface="Arial" pitchFamily="34" charset="-120"/>
+              </a:rPr>
+              <a:t>Stated method</a:t>
+            </a:r>
+            <a:endParaRPr lang="en-US" sz="1500" dirty="0"/>
+          </a:p>
+        </p:txBody>
+      </p:sp>
+      <p:sp>
+        <p:nvSpPr>
+          <p:cNvPr id="10" name="Text 7"/>
+          <p:cNvSpPr txBox="1"/>
+          <p:nvPr/>
+        </p:nvSpPr>
+        <p:spPr>
+          <a:xfrm>
+            <a:off x="8558784" y="4864608"/>
+            <a:ext cx="3017520" cy="914400"/>
+          </a:xfrm>
+          <a:prstGeom prst="rect">
+            <a:avLst/>
+          </a:prstGeom>
+          <a:noFill/>
+          <a:ln/>
+        </p:spPr>
+        <p:txBody>
+          <a:bodyPr wrap="square" lIns="0" tIns="0" rIns="0" bIns="0" rtlCol="0" anchor="ctr"/>
+          <a:lstStyle/>
+          <a:p>
+            <a:pPr indent="0" marL="0">
+              <a:buNone/>
+            </a:pPr>
+            <a:r>
+              <a:rPr lang="en-US" sz="1250" dirty="0">
+                <a:solidFill>
+                  <a:srgbClr val="0F172A"/>
+                </a:solidFill>
+                <a:latin typeface="Calibri" pitchFamily="34" charset="0"/>
+                <a:ea typeface="Calibri" pitchFamily="34" charset="-122"/>
+                <a:cs typeface="Calibri" pitchFamily="34" charset="-120"/>
+              </a:rPr>
+              <a:t>The feed carries a method_note saying it is weighted rules, not a model — shown in the UI verbatim.</a:t>
+            </a:r>
+            <a:endParaRPr lang="en-US" sz="1250" dirty="0"/>
+          </a:p>
+        </p:txBody>
+      </p:sp>
+      <p:sp>
+        <p:nvSpPr>
+          <p:cNvPr id="11" name="Text 8"/>
+          <p:cNvSpPr txBox="1"/>
+          <p:nvPr/>
+        </p:nvSpPr>
+        <p:spPr>
+          <a:xfrm>
+            <a:off x="566928" y="5925312"/>
+            <a:ext cx="7772400" cy="256032"/>
+          </a:xfrm>
+          <a:prstGeom prst="rect">
+            <a:avLst/>
+          </a:prstGeom>
+          <a:noFill/>
+          <a:ln/>
+        </p:spPr>
+        <p:txBody>
+          <a:bodyPr wrap="square" lIns="0" tIns="0" rIns="0" bIns="0" rtlCol="0" anchor="ctr"/>
+          <a:lstStyle/>
+          <a:p>
+            <a:pPr indent="0" marL="0">
+              <a:buNone/>
+            </a:pPr>
+            <a:r>
+              <a:rPr lang="en-US" sz="1100" i="1" dirty="0">
+                <a:solidFill>
+                  <a:srgbClr val="64748B"/>
+                </a:solidFill>
+                <a:latin typeface="Calibri" pitchFamily="34" charset="0"/>
+                <a:ea typeface="Calibri" pitchFamily="34" charset="-122"/>
+                <a:cs typeface="Calibri" pitchFamily="34" charset="-120"/>
+              </a:rPr>
+              <a:t>Moderation dashboard · captured against a running backend</a:t>
+            </a:r>
+            <a:endParaRPr lang="en-US" sz="1100" dirty="0"/>
+          </a:p>
+        </p:txBody>
+      </p:sp>
+    </p:spTree>
+  </p:cSld>
+  <p:clrMapOvr>
+    <a:masterClrMapping/>
+  </p:clrMapOvr>
+</p:sld>
+</file>
+
+<file path=ppt/slides/slide8.xml><?xml version="1.0" encoding="utf-8"?>
+<p:sld xmlns:a="http://schemas.openxmlformats.org/drawingml/2006/main" xmlns:r="http://schemas.openxmlformats.org/officeDocument/2006/relationships" xmlns:p="http://schemas.openxmlformats.org/presentationml/2006/main">
+  <p:cSld name="Slide 8">
     <p:bg>
       <p:bgPr>
         <a:solidFill>
@@ -9681,7 +11768,7 @@
                 <a:ea typeface="Calibri" pitchFamily="34" charset="-122"/>
                 <a:cs typeface="Calibri" pitchFamily="34" charset="-120"/>
               </a:rPr>
-              <a:t>Flutter app (Android-first)</a:t>
+              <a:t>Flutter app (Android-first) + native Kotlin call/SMS/WhatsApp screening</a:t>
             </a:r>
             <a:endParaRPr lang="en-US" sz="1250" dirty="0"/>
           </a:p>
@@ -10258,9 +12345,9 @@
 </p:sld>
 </file>
 
-<file path=ppt/slides/slide8.xml><?xml version="1.0" encoding="utf-8"?>
+<file path=ppt/slides/slide9.xml><?xml version="1.0" encoding="utf-8"?>
 <p:sld xmlns:a="http://schemas.openxmlformats.org/drawingml/2006/main" xmlns:r="http://schemas.openxmlformats.org/officeDocument/2006/relationships" xmlns:p="http://schemas.openxmlformats.org/presentationml/2006/main">
-  <p:cSld name="Slide 8">
+  <p:cSld name="Slide 9">
     <p:bg>
       <p:bgPr>
         <a:solidFill>
@@ -10752,899 +12839,6 @@
                 <a:cs typeface="Calibri" pitchFamily="34" charset="-120"/>
               </a:rPr>
               <a:t>Evidence redaction — deterministic regex, so what is removed from a stored excerpt is auditable and testable rather than a model's judgement call.</a:t>
-            </a:r>
-            <a:endParaRPr lang="en-US" sz="1250" dirty="0"/>
-          </a:p>
-        </p:txBody>
-      </p:sp>
-    </p:spTree>
-  </p:cSld>
-  <p:clrMapOvr>
-    <a:masterClrMapping/>
-  </p:clrMapOvr>
-</p:sld>
-</file>
-
-<file path=ppt/slides/slide9.xml><?xml version="1.0" encoding="utf-8"?>
-<p:sld xmlns:a="http://schemas.openxmlformats.org/drawingml/2006/main" xmlns:r="http://schemas.openxmlformats.org/officeDocument/2006/relationships" xmlns:p="http://schemas.openxmlformats.org/presentationml/2006/main">
-  <p:cSld name="Slide 9">
-    <p:bg>
-      <p:bgPr>
-        <a:solidFill>
-          <a:srgbClr val="F4FAF8"/>
-        </a:solidFill>
-      </p:bgPr>
-    </p:bg>
-    <p:spTree>
-      <p:nvGrpSpPr>
-        <p:cNvPr id="1" name=""/>
-        <p:cNvGrpSpPr/>
-        <p:nvPr/>
-      </p:nvGrpSpPr>
-      <p:grpSpPr>
-        <a:xfrm>
-          <a:off x="0" y="0"/>
-          <a:ext cx="0" cy="0"/>
-          <a:chOff x="0" y="0"/>
-          <a:chExt cx="0" cy="0"/>
-        </a:xfrm>
-      </p:grpSpPr>
-      <p:sp>
-        <p:nvSpPr>
-          <p:cNvPr id="2" name="Text 0"/>
-          <p:cNvSpPr txBox="1"/>
-          <p:nvPr/>
-        </p:nvSpPr>
-        <p:spPr>
-          <a:xfrm>
-            <a:off x="566928" y="457200"/>
-            <a:ext cx="11027664" cy="256032"/>
-          </a:xfrm>
-          <a:prstGeom prst="rect">
-            <a:avLst/>
-          </a:prstGeom>
-          <a:noFill/>
-          <a:ln/>
-        </p:spPr>
-        <p:txBody>
-          <a:bodyPr wrap="square" lIns="0" tIns="0" rIns="0" bIns="0" rtlCol="0" anchor="ctr"/>
-          <a:lstStyle/>
-          <a:p>
-            <a:pPr indent="0" marL="0">
-              <a:buNone/>
-            </a:pPr>
-            <a:r>
-              <a:rPr lang="en-US" sz="1200" b="1" spc="140" kern="0" dirty="0">
-                <a:solidFill>
-                  <a:srgbClr val="14A085"/>
-                </a:solidFill>
-                <a:latin typeface="Arial" pitchFamily="34" charset="0"/>
-                <a:ea typeface="Arial" pitchFamily="34" charset="-122"/>
-                <a:cs typeface="Arial" pitchFamily="34" charset="-120"/>
-              </a:rPr>
-              <a:t>COVERAGE</a:t>
-            </a:r>
-            <a:endParaRPr lang="en-US" sz="1200" dirty="0"/>
-          </a:p>
-        </p:txBody>
-      </p:sp>
-      <p:sp>
-        <p:nvSpPr>
-          <p:cNvPr id="3" name="Text 1"/>
-          <p:cNvSpPr txBox="1"/>
-          <p:nvPr/>
-        </p:nvSpPr>
-        <p:spPr>
-          <a:xfrm>
-            <a:off x="566928" y="749808"/>
-            <a:ext cx="11027664" cy="914400"/>
-          </a:xfrm>
-          <a:prstGeom prst="rect">
-            <a:avLst/>
-          </a:prstGeom>
-          <a:noFill/>
-          <a:ln/>
-        </p:spPr>
-        <p:txBody>
-          <a:bodyPr wrap="square" lIns="0" tIns="0" rIns="0" bIns="0" rtlCol="0" anchor="ctr"/>
-          <a:lstStyle/>
-          <a:p>
-            <a:pPr indent="0" marL="0">
-              <a:buNone/>
-            </a:pPr>
-            <a:r>
-              <a:rPr lang="en-US" sz="3200" b="1" dirty="0">
-                <a:solidFill>
-                  <a:srgbClr val="0F172A"/>
-                </a:solidFill>
-                <a:latin typeface="Arial" pitchFamily="34" charset="0"/>
-                <a:ea typeface="Arial" pitchFamily="34" charset="-122"/>
-                <a:cs typeface="Arial" pitchFamily="34" charset="-120"/>
-              </a:rPr>
-              <a:t>One codebase, 7 markets.</a:t>
-            </a:r>
-            <a:endParaRPr lang="en-US" sz="3200" dirty="0"/>
-          </a:p>
-        </p:txBody>
-      </p:sp>
-      <p:sp>
-        <p:nvSpPr>
-          <p:cNvPr id="4" name="Shape 2"/>
-          <p:cNvSpPr/>
-          <p:nvPr/>
-        </p:nvSpPr>
-        <p:spPr>
-          <a:xfrm>
-            <a:off x="566928" y="1792224"/>
-            <a:ext cx="1430122" cy="512064"/>
-          </a:xfrm>
-          <a:prstGeom prst="roundRect">
-            <a:avLst>
-              <a:gd name="adj" fmla="val 50000"/>
-            </a:avLst>
-          </a:prstGeom>
-          <a:solidFill>
-            <a:srgbClr val="FFFFFF"/>
-          </a:solidFill>
-          <a:ln w="12700">
-            <a:solidFill>
-              <a:srgbClr val="D6E7E2"/>
-            </a:solidFill>
-            <a:prstDash val="solid"/>
-          </a:ln>
-        </p:spPr>
-      </p:sp>
-      <p:sp>
-        <p:nvSpPr>
-          <p:cNvPr id="5" name="Text 3"/>
-          <p:cNvSpPr txBox="1"/>
-          <p:nvPr/>
-        </p:nvSpPr>
-        <p:spPr>
-          <a:xfrm>
-            <a:off x="566928" y="1792224"/>
-            <a:ext cx="1430122" cy="512064"/>
-          </a:xfrm>
-          <a:prstGeom prst="rect">
-            <a:avLst/>
-          </a:prstGeom>
-          <a:noFill/>
-          <a:ln/>
-        </p:spPr>
-        <p:txBody>
-          <a:bodyPr wrap="square" lIns="0" tIns="0" rIns="0" bIns="0" rtlCol="0" anchor="ctr"/>
-          <a:lstStyle/>
-          <a:p>
-            <a:pPr algn="ctr" indent="0" marL="0">
-              <a:buNone/>
-            </a:pPr>
-            <a:r>
-              <a:rPr lang="en-US" sz="1350" b="1" dirty="0">
-                <a:solidFill>
-                  <a:srgbClr val="0F6B5C"/>
-                </a:solidFill>
-                <a:latin typeface="Arial" pitchFamily="34" charset="0"/>
-                <a:ea typeface="Arial" pitchFamily="34" charset="-122"/>
-                <a:cs typeface="Arial" pitchFamily="34" charset="-120"/>
-              </a:rPr>
-              <a:t>Zimbabwe</a:t>
-            </a:r>
-            <a:endParaRPr lang="en-US" sz="1350" dirty="0"/>
-          </a:p>
-        </p:txBody>
-      </p:sp>
-      <p:sp>
-        <p:nvSpPr>
-          <p:cNvPr id="6" name="Shape 4"/>
-          <p:cNvSpPr/>
-          <p:nvPr/>
-        </p:nvSpPr>
-        <p:spPr>
-          <a:xfrm>
-            <a:off x="2143354" y="1792224"/>
-            <a:ext cx="1106424" cy="512064"/>
-          </a:xfrm>
-          <a:prstGeom prst="roundRect">
-            <a:avLst>
-              <a:gd name="adj" fmla="val 50000"/>
-            </a:avLst>
-          </a:prstGeom>
-          <a:solidFill>
-            <a:srgbClr val="FFFFFF"/>
-          </a:solidFill>
-          <a:ln w="12700">
-            <a:solidFill>
-              <a:srgbClr val="D6E7E2"/>
-            </a:solidFill>
-            <a:prstDash val="solid"/>
-          </a:ln>
-        </p:spPr>
-      </p:sp>
-      <p:sp>
-        <p:nvSpPr>
-          <p:cNvPr id="7" name="Text 5"/>
-          <p:cNvSpPr txBox="1"/>
-          <p:nvPr/>
-        </p:nvSpPr>
-        <p:spPr>
-          <a:xfrm>
-            <a:off x="2143354" y="1792224"/>
-            <a:ext cx="1106424" cy="512064"/>
-          </a:xfrm>
-          <a:prstGeom prst="rect">
-            <a:avLst/>
-          </a:prstGeom>
-          <a:noFill/>
-          <a:ln/>
-        </p:spPr>
-        <p:txBody>
-          <a:bodyPr wrap="square" lIns="0" tIns="0" rIns="0" bIns="0" rtlCol="0" anchor="ctr"/>
-          <a:lstStyle/>
-          <a:p>
-            <a:pPr algn="ctr" indent="0" marL="0">
-              <a:buNone/>
-            </a:pPr>
-            <a:r>
-              <a:rPr lang="en-US" sz="1350" b="1" dirty="0">
-                <a:solidFill>
-                  <a:srgbClr val="0F6B5C"/>
-                </a:solidFill>
-                <a:latin typeface="Arial" pitchFamily="34" charset="0"/>
-                <a:ea typeface="Arial" pitchFamily="34" charset="-122"/>
-                <a:cs typeface="Arial" pitchFamily="34" charset="-120"/>
-              </a:rPr>
-              <a:t>Kenya</a:t>
-            </a:r>
-            <a:endParaRPr lang="en-US" sz="1350" dirty="0"/>
-          </a:p>
-        </p:txBody>
-      </p:sp>
-      <p:sp>
-        <p:nvSpPr>
-          <p:cNvPr id="8" name="Shape 6"/>
-          <p:cNvSpPr/>
-          <p:nvPr/>
-        </p:nvSpPr>
-        <p:spPr>
-          <a:xfrm>
-            <a:off x="3396082" y="1792224"/>
-            <a:ext cx="1322222" cy="512064"/>
-          </a:xfrm>
-          <a:prstGeom prst="roundRect">
-            <a:avLst>
-              <a:gd name="adj" fmla="val 50000"/>
-            </a:avLst>
-          </a:prstGeom>
-          <a:solidFill>
-            <a:srgbClr val="FFFFFF"/>
-          </a:solidFill>
-          <a:ln w="12700">
-            <a:solidFill>
-              <a:srgbClr val="D6E7E2"/>
-            </a:solidFill>
-            <a:prstDash val="solid"/>
-          </a:ln>
-        </p:spPr>
-      </p:sp>
-      <p:sp>
-        <p:nvSpPr>
-          <p:cNvPr id="9" name="Text 7"/>
-          <p:cNvSpPr txBox="1"/>
-          <p:nvPr/>
-        </p:nvSpPr>
-        <p:spPr>
-          <a:xfrm>
-            <a:off x="3396082" y="1792224"/>
-            <a:ext cx="1322222" cy="512064"/>
-          </a:xfrm>
-          <a:prstGeom prst="rect">
-            <a:avLst/>
-          </a:prstGeom>
-          <a:noFill/>
-          <a:ln/>
-        </p:spPr>
-        <p:txBody>
-          <a:bodyPr wrap="square" lIns="0" tIns="0" rIns="0" bIns="0" rtlCol="0" anchor="ctr"/>
-          <a:lstStyle/>
-          <a:p>
-            <a:pPr algn="ctr" indent="0" marL="0">
-              <a:buNone/>
-            </a:pPr>
-            <a:r>
-              <a:rPr lang="en-US" sz="1350" b="1" dirty="0">
-                <a:solidFill>
-                  <a:srgbClr val="0F6B5C"/>
-                </a:solidFill>
-                <a:latin typeface="Arial" pitchFamily="34" charset="0"/>
-                <a:ea typeface="Arial" pitchFamily="34" charset="-122"/>
-                <a:cs typeface="Arial" pitchFamily="34" charset="-120"/>
-              </a:rPr>
-              <a:t>Nigeria</a:t>
-            </a:r>
-            <a:endParaRPr lang="en-US" sz="1350" dirty="0"/>
-          </a:p>
-        </p:txBody>
-      </p:sp>
-      <p:sp>
-        <p:nvSpPr>
-          <p:cNvPr id="10" name="Shape 8"/>
-          <p:cNvSpPr/>
-          <p:nvPr/>
-        </p:nvSpPr>
-        <p:spPr>
-          <a:xfrm>
-            <a:off x="4864608" y="1792224"/>
-            <a:ext cx="1214323" cy="512064"/>
-          </a:xfrm>
-          <a:prstGeom prst="roundRect">
-            <a:avLst>
-              <a:gd name="adj" fmla="val 50000"/>
-            </a:avLst>
-          </a:prstGeom>
-          <a:solidFill>
-            <a:srgbClr val="FFFFFF"/>
-          </a:solidFill>
-          <a:ln w="12700">
-            <a:solidFill>
-              <a:srgbClr val="D6E7E2"/>
-            </a:solidFill>
-            <a:prstDash val="solid"/>
-          </a:ln>
-        </p:spPr>
-      </p:sp>
-      <p:sp>
-        <p:nvSpPr>
-          <p:cNvPr id="11" name="Text 9"/>
-          <p:cNvSpPr txBox="1"/>
-          <p:nvPr/>
-        </p:nvSpPr>
-        <p:spPr>
-          <a:xfrm>
-            <a:off x="4864608" y="1792224"/>
-            <a:ext cx="1214323" cy="512064"/>
-          </a:xfrm>
-          <a:prstGeom prst="rect">
-            <a:avLst/>
-          </a:prstGeom>
-          <a:noFill/>
-          <a:ln/>
-        </p:spPr>
-        <p:txBody>
-          <a:bodyPr wrap="square" lIns="0" tIns="0" rIns="0" bIns="0" rtlCol="0" anchor="ctr"/>
-          <a:lstStyle/>
-          <a:p>
-            <a:pPr algn="ctr" indent="0" marL="0">
-              <a:buNone/>
-            </a:pPr>
-            <a:r>
-              <a:rPr lang="en-US" sz="1350" b="1" dirty="0">
-                <a:solidFill>
-                  <a:srgbClr val="0F6B5C"/>
-                </a:solidFill>
-                <a:latin typeface="Arial" pitchFamily="34" charset="0"/>
-                <a:ea typeface="Arial" pitchFamily="34" charset="-122"/>
-                <a:cs typeface="Arial" pitchFamily="34" charset="-120"/>
-              </a:rPr>
-              <a:t>Uganda</a:t>
-            </a:r>
-            <a:endParaRPr lang="en-US" sz="1350" dirty="0"/>
-          </a:p>
-        </p:txBody>
-      </p:sp>
-      <p:sp>
-        <p:nvSpPr>
-          <p:cNvPr id="12" name="Shape 10"/>
-          <p:cNvSpPr/>
-          <p:nvPr/>
-        </p:nvSpPr>
-        <p:spPr>
-          <a:xfrm>
-            <a:off x="6225235" y="1792224"/>
-            <a:ext cx="1861718" cy="512064"/>
-          </a:xfrm>
-          <a:prstGeom prst="roundRect">
-            <a:avLst>
-              <a:gd name="adj" fmla="val 50000"/>
-            </a:avLst>
-          </a:prstGeom>
-          <a:solidFill>
-            <a:srgbClr val="FFFFFF"/>
-          </a:solidFill>
-          <a:ln w="12700">
-            <a:solidFill>
-              <a:srgbClr val="D6E7E2"/>
-            </a:solidFill>
-            <a:prstDash val="solid"/>
-          </a:ln>
-        </p:spPr>
-      </p:sp>
-      <p:sp>
-        <p:nvSpPr>
-          <p:cNvPr id="13" name="Text 11"/>
-          <p:cNvSpPr txBox="1"/>
-          <p:nvPr/>
-        </p:nvSpPr>
-        <p:spPr>
-          <a:xfrm>
-            <a:off x="6225235" y="1792224"/>
-            <a:ext cx="1861718" cy="512064"/>
-          </a:xfrm>
-          <a:prstGeom prst="rect">
-            <a:avLst/>
-          </a:prstGeom>
-          <a:noFill/>
-          <a:ln/>
-        </p:spPr>
-        <p:txBody>
-          <a:bodyPr wrap="square" lIns="0" tIns="0" rIns="0" bIns="0" rtlCol="0" anchor="ctr"/>
-          <a:lstStyle/>
-          <a:p>
-            <a:pPr algn="ctr" indent="0" marL="0">
-              <a:buNone/>
-            </a:pPr>
-            <a:r>
-              <a:rPr lang="en-US" sz="1350" b="1" dirty="0">
-                <a:solidFill>
-                  <a:srgbClr val="0F6B5C"/>
-                </a:solidFill>
-                <a:latin typeface="Arial" pitchFamily="34" charset="0"/>
-                <a:ea typeface="Arial" pitchFamily="34" charset="-122"/>
-                <a:cs typeface="Arial" pitchFamily="34" charset="-120"/>
-              </a:rPr>
-              <a:t>South Africa</a:t>
-            </a:r>
-            <a:endParaRPr lang="en-US" sz="1350" dirty="0"/>
-          </a:p>
-        </p:txBody>
-      </p:sp>
-      <p:sp>
-        <p:nvSpPr>
-          <p:cNvPr id="14" name="Shape 12"/>
-          <p:cNvSpPr/>
-          <p:nvPr/>
-        </p:nvSpPr>
-        <p:spPr>
-          <a:xfrm>
-            <a:off x="8233258" y="1792224"/>
-            <a:ext cx="1106424" cy="512064"/>
-          </a:xfrm>
-          <a:prstGeom prst="roundRect">
-            <a:avLst>
-              <a:gd name="adj" fmla="val 50000"/>
-            </a:avLst>
-          </a:prstGeom>
-          <a:solidFill>
-            <a:srgbClr val="FFFFFF"/>
-          </a:solidFill>
-          <a:ln w="12700">
-            <a:solidFill>
-              <a:srgbClr val="D6E7E2"/>
-            </a:solidFill>
-            <a:prstDash val="solid"/>
-          </a:ln>
-        </p:spPr>
-      </p:sp>
-      <p:sp>
-        <p:nvSpPr>
-          <p:cNvPr id="15" name="Text 13"/>
-          <p:cNvSpPr txBox="1"/>
-          <p:nvPr/>
-        </p:nvSpPr>
-        <p:spPr>
-          <a:xfrm>
-            <a:off x="8233258" y="1792224"/>
-            <a:ext cx="1106424" cy="512064"/>
-          </a:xfrm>
-          <a:prstGeom prst="rect">
-            <a:avLst/>
-          </a:prstGeom>
-          <a:noFill/>
-          <a:ln/>
-        </p:spPr>
-        <p:txBody>
-          <a:bodyPr wrap="square" lIns="0" tIns="0" rIns="0" bIns="0" rtlCol="0" anchor="ctr"/>
-          <a:lstStyle/>
-          <a:p>
-            <a:pPr algn="ctr" indent="0" marL="0">
-              <a:buNone/>
-            </a:pPr>
-            <a:r>
-              <a:rPr lang="en-US" sz="1350" b="1" dirty="0">
-                <a:solidFill>
-                  <a:srgbClr val="0F6B5C"/>
-                </a:solidFill>
-                <a:latin typeface="Arial" pitchFamily="34" charset="0"/>
-                <a:ea typeface="Arial" pitchFamily="34" charset="-122"/>
-                <a:cs typeface="Arial" pitchFamily="34" charset="-120"/>
-              </a:rPr>
-              <a:t>Ghana</a:t>
-            </a:r>
-            <a:endParaRPr lang="en-US" sz="1350" dirty="0"/>
-          </a:p>
-        </p:txBody>
-      </p:sp>
-      <p:sp>
-        <p:nvSpPr>
-          <p:cNvPr id="16" name="Shape 14"/>
-          <p:cNvSpPr/>
-          <p:nvPr/>
-        </p:nvSpPr>
-        <p:spPr>
-          <a:xfrm>
-            <a:off x="9485986" y="1792224"/>
-            <a:ext cx="1430122" cy="512064"/>
-          </a:xfrm>
-          <a:prstGeom prst="roundRect">
-            <a:avLst>
-              <a:gd name="adj" fmla="val 50000"/>
-            </a:avLst>
-          </a:prstGeom>
-          <a:solidFill>
-            <a:srgbClr val="FFFFFF"/>
-          </a:solidFill>
-          <a:ln w="12700">
-            <a:solidFill>
-              <a:srgbClr val="D6E7E2"/>
-            </a:solidFill>
-            <a:prstDash val="solid"/>
-          </a:ln>
-        </p:spPr>
-      </p:sp>
-      <p:sp>
-        <p:nvSpPr>
-          <p:cNvPr id="17" name="Text 15"/>
-          <p:cNvSpPr txBox="1"/>
-          <p:nvPr/>
-        </p:nvSpPr>
-        <p:spPr>
-          <a:xfrm>
-            <a:off x="9485986" y="1792224"/>
-            <a:ext cx="1430122" cy="512064"/>
-          </a:xfrm>
-          <a:prstGeom prst="rect">
-            <a:avLst/>
-          </a:prstGeom>
-          <a:noFill/>
-          <a:ln/>
-        </p:spPr>
-        <p:txBody>
-          <a:bodyPr wrap="square" lIns="0" tIns="0" rIns="0" bIns="0" rtlCol="0" anchor="ctr"/>
-          <a:lstStyle/>
-          <a:p>
-            <a:pPr algn="ctr" indent="0" marL="0">
-              <a:buNone/>
-            </a:pPr>
-            <a:r>
-              <a:rPr lang="en-US" sz="1350" b="1" dirty="0">
-                <a:solidFill>
-                  <a:srgbClr val="0F6B5C"/>
-                </a:solidFill>
-                <a:latin typeface="Arial" pitchFamily="34" charset="0"/>
-                <a:ea typeface="Arial" pitchFamily="34" charset="-122"/>
-                <a:cs typeface="Arial" pitchFamily="34" charset="-120"/>
-              </a:rPr>
-              <a:t>Tanzania</a:t>
-            </a:r>
-            <a:endParaRPr lang="en-US" sz="1350" dirty="0"/>
-          </a:p>
-        </p:txBody>
-      </p:sp>
-      <p:sp>
-        <p:nvSpPr>
-          <p:cNvPr id="18" name="Shape 16"/>
-          <p:cNvSpPr/>
-          <p:nvPr/>
-        </p:nvSpPr>
-        <p:spPr>
-          <a:xfrm>
-            <a:off x="566928" y="2761488"/>
-            <a:ext cx="11027664" cy="969264"/>
-          </a:xfrm>
-          <a:prstGeom prst="roundRect">
-            <a:avLst>
-              <a:gd name="adj" fmla="val 7547"/>
-            </a:avLst>
-          </a:prstGeom>
-          <a:solidFill>
-            <a:srgbClr val="FFFFFF"/>
-          </a:solidFill>
-          <a:ln/>
-          <a:effectLst>
-            <a:outerShdw sx="100000" sy="100000" kx="0" ky="0" algn="bl" rotWithShape="0" blurRad="127000" dist="25400" dir="5400000">
-              <a:srgbClr val="0F172A">
-                <a:alpha val="10000"/>
-              </a:srgbClr>
-            </a:outerShdw>
-          </a:effectLst>
-        </p:spPr>
-      </p:sp>
-      <p:sp>
-        <p:nvSpPr>
-          <p:cNvPr id="19" name="Text 17"/>
-          <p:cNvSpPr txBox="1"/>
-          <p:nvPr/>
-        </p:nvSpPr>
-        <p:spPr>
-          <a:xfrm>
-            <a:off x="877824" y="2889504"/>
-            <a:ext cx="10405872" cy="274320"/>
-          </a:xfrm>
-          <a:prstGeom prst="rect">
-            <a:avLst/>
-          </a:prstGeom>
-          <a:noFill/>
-          <a:ln/>
-        </p:spPr>
-        <p:txBody>
-          <a:bodyPr wrap="square" lIns="0" tIns="0" rIns="0" bIns="0" rtlCol="0" anchor="ctr"/>
-          <a:lstStyle/>
-          <a:p>
-            <a:pPr indent="0" marL="0">
-              <a:buNone/>
-            </a:pPr>
-            <a:r>
-              <a:rPr lang="en-US" sz="1500" b="1" dirty="0">
-                <a:solidFill>
-                  <a:srgbClr val="0F6B5C"/>
-                </a:solidFill>
-                <a:latin typeface="Arial" pitchFamily="34" charset="0"/>
-                <a:ea typeface="Arial" pitchFamily="34" charset="-122"/>
-                <a:cs typeface="Arial" pitchFamily="34" charset="-120"/>
-              </a:rPr>
-              <a:t>Numbers stored in E.164</a:t>
-            </a:r>
-            <a:endParaRPr lang="en-US" sz="1500" dirty="0"/>
-          </a:p>
-        </p:txBody>
-      </p:sp>
-      <p:sp>
-        <p:nvSpPr>
-          <p:cNvPr id="20" name="Text 18"/>
-          <p:cNvSpPr txBox="1"/>
-          <p:nvPr/>
-        </p:nvSpPr>
-        <p:spPr>
-          <a:xfrm>
-            <a:off x="877824" y="3182112"/>
-            <a:ext cx="10405872" cy="457200"/>
-          </a:xfrm>
-          <a:prstGeom prst="rect">
-            <a:avLst/>
-          </a:prstGeom>
-          <a:noFill/>
-          <a:ln/>
-        </p:spPr>
-        <p:txBody>
-          <a:bodyPr wrap="square" lIns="0" tIns="0" rIns="0" bIns="0" rtlCol="0" anchor="ctr"/>
-          <a:lstStyle/>
-          <a:p>
-            <a:pPr indent="0" marL="0">
-              <a:buNone/>
-            </a:pPr>
-            <a:r>
-              <a:rPr lang="en-US" sz="1250" dirty="0">
-                <a:solidFill>
-                  <a:srgbClr val="0F172A"/>
-                </a:solidFill>
-                <a:latin typeface="Calibri" pitchFamily="34" charset="0"/>
-                <a:ea typeface="Calibri" pitchFamily="34" charset="-122"/>
-                <a:cs typeface="Calibri" pitchFamily="34" charset="-120"/>
-              </a:rPr>
-              <a:t>0771234567 is a valid Zimbabwean, Ugandan and Tanzanian number. A national-format key would have silently merged three unrelated people's reputations — invisible in a demo, catastrophic in production.</a:t>
-            </a:r>
-            <a:endParaRPr lang="en-US" sz="1250" dirty="0"/>
-          </a:p>
-        </p:txBody>
-      </p:sp>
-      <p:sp>
-        <p:nvSpPr>
-          <p:cNvPr id="21" name="Shape 19"/>
-          <p:cNvSpPr/>
-          <p:nvPr/>
-        </p:nvSpPr>
-        <p:spPr>
-          <a:xfrm>
-            <a:off x="566928" y="3858768"/>
-            <a:ext cx="11027664" cy="969264"/>
-          </a:xfrm>
-          <a:prstGeom prst="roundRect">
-            <a:avLst>
-              <a:gd name="adj" fmla="val 7547"/>
-            </a:avLst>
-          </a:prstGeom>
-          <a:solidFill>
-            <a:srgbClr val="FFFFFF"/>
-          </a:solidFill>
-          <a:ln/>
-          <a:effectLst>
-            <a:outerShdw sx="100000" sy="100000" kx="0" ky="0" algn="bl" rotWithShape="0" blurRad="127000" dist="25400" dir="5400000">
-              <a:srgbClr val="0F172A">
-                <a:alpha val="10000"/>
-              </a:srgbClr>
-            </a:outerShdw>
-          </a:effectLst>
-        </p:spPr>
-      </p:sp>
-      <p:sp>
-        <p:nvSpPr>
-          <p:cNvPr id="22" name="Text 20"/>
-          <p:cNvSpPr txBox="1"/>
-          <p:nvPr/>
-        </p:nvSpPr>
-        <p:spPr>
-          <a:xfrm>
-            <a:off x="877824" y="3986784"/>
-            <a:ext cx="10405872" cy="274320"/>
-          </a:xfrm>
-          <a:prstGeom prst="rect">
-            <a:avLst/>
-          </a:prstGeom>
-          <a:noFill/>
-          <a:ln/>
-        </p:spPr>
-        <p:txBody>
-          <a:bodyPr wrap="square" lIns="0" tIns="0" rIns="0" bIns="0" rtlCol="0" anchor="ctr"/>
-          <a:lstStyle/>
-          <a:p>
-            <a:pPr indent="0" marL="0">
-              <a:buNone/>
-            </a:pPr>
-            <a:r>
-              <a:rPr lang="en-US" sz="1500" b="1" dirty="0">
-                <a:solidFill>
-                  <a:srgbClr val="0F6B5C"/>
-                </a:solidFill>
-                <a:latin typeface="Arial" pitchFamily="34" charset="0"/>
-                <a:ea typeface="Arial" pitchFamily="34" charset="-122"/>
-                <a:cs typeface="Arial" pitchFamily="34" charset="-120"/>
-              </a:rPr>
-              <a:t>One classifier, localised grounding</a:t>
-            </a:r>
-            <a:endParaRPr lang="en-US" sz="1500" dirty="0"/>
-          </a:p>
-        </p:txBody>
-      </p:sp>
-      <p:sp>
-        <p:nvSpPr>
-          <p:cNvPr id="23" name="Text 21"/>
-          <p:cNvSpPr txBox="1"/>
-          <p:nvPr/>
-        </p:nvSpPr>
-        <p:spPr>
-          <a:xfrm>
-            <a:off x="877824" y="4279392"/>
-            <a:ext cx="10405872" cy="457200"/>
-          </a:xfrm>
-          <a:prstGeom prst="rect">
-            <a:avLst/>
-          </a:prstGeom>
-          <a:noFill/>
-          <a:ln/>
-        </p:spPr>
-        <p:txBody>
-          <a:bodyPr wrap="square" lIns="0" tIns="0" rIns="0" bIns="0" rtlCol="0" anchor="ctr"/>
-          <a:lstStyle/>
-          <a:p>
-            <a:pPr indent="0" marL="0">
-              <a:buNone/>
-            </a:pPr>
-            <a:r>
-              <a:rPr lang="en-US" sz="1250" dirty="0">
-                <a:solidFill>
-                  <a:srgbClr val="0F172A"/>
-                </a:solidFill>
-                <a:latin typeface="Calibri" pitchFamily="34" charset="0"/>
-                <a:ea typeface="Calibri" pitchFamily="34" charset="-122"/>
-                <a:cs typeface="Calibri" pitchFamily="34" charset="-120"/>
-              </a:rPr>
-              <a:t>The mechanism generalises even when the vocabulary doesn't, so one model trained across all markets sees more of each pattern than seven per-country models would.</a:t>
-            </a:r>
-            <a:endParaRPr lang="en-US" sz="1250" dirty="0"/>
-          </a:p>
-        </p:txBody>
-      </p:sp>
-      <p:sp>
-        <p:nvSpPr>
-          <p:cNvPr id="24" name="Shape 22"/>
-          <p:cNvSpPr/>
-          <p:nvPr/>
-        </p:nvSpPr>
-        <p:spPr>
-          <a:xfrm>
-            <a:off x="566928" y="4956048"/>
-            <a:ext cx="11027664" cy="969264"/>
-          </a:xfrm>
-          <a:prstGeom prst="roundRect">
-            <a:avLst>
-              <a:gd name="adj" fmla="val 7547"/>
-            </a:avLst>
-          </a:prstGeom>
-          <a:solidFill>
-            <a:srgbClr val="FFFFFF"/>
-          </a:solidFill>
-          <a:ln/>
-          <a:effectLst>
-            <a:outerShdw sx="100000" sy="100000" kx="0" ky="0" algn="bl" rotWithShape="0" blurRad="127000" dist="25400" dir="5400000">
-              <a:srgbClr val="0F172A">
-                <a:alpha val="10000"/>
-              </a:srgbClr>
-            </a:outerShdw>
-          </a:effectLst>
-        </p:spPr>
-      </p:sp>
-      <p:sp>
-        <p:nvSpPr>
-          <p:cNvPr id="25" name="Text 23"/>
-          <p:cNvSpPr txBox="1"/>
-          <p:nvPr/>
-        </p:nvSpPr>
-        <p:spPr>
-          <a:xfrm>
-            <a:off x="877824" y="5084064"/>
-            <a:ext cx="10405872" cy="274320"/>
-          </a:xfrm>
-          <a:prstGeom prst="rect">
-            <a:avLst/>
-          </a:prstGeom>
-          <a:noFill/>
-          <a:ln/>
-        </p:spPr>
-        <p:txBody>
-          <a:bodyPr wrap="square" lIns="0" tIns="0" rIns="0" bIns="0" rtlCol="0" anchor="ctr"/>
-          <a:lstStyle/>
-          <a:p>
-            <a:pPr indent="0" marL="0">
-              <a:buNone/>
-            </a:pPr>
-            <a:r>
-              <a:rPr lang="en-US" sz="1500" b="1" dirty="0">
-                <a:solidFill>
-                  <a:srgbClr val="0F6B5C"/>
-                </a:solidFill>
-                <a:latin typeface="Arial" pitchFamily="34" charset="0"/>
-                <a:ea typeface="Arial" pitchFamily="34" charset="-122"/>
-                <a:cs typeface="Arial" pitchFamily="34" charset="-120"/>
-              </a:rPr>
-              <a:t>Coarse regions, two hotspot maps</a:t>
-            </a:r>
-            <a:endParaRPr lang="en-US" sz="1500" dirty="0"/>
-          </a:p>
-        </p:txBody>
-      </p:sp>
-      <p:sp>
-        <p:nvSpPr>
-          <p:cNvPr id="26" name="Text 24"/>
-          <p:cNvSpPr txBox="1"/>
-          <p:nvPr/>
-        </p:nvSpPr>
-        <p:spPr>
-          <a:xfrm>
-            <a:off x="877824" y="5376672"/>
-            <a:ext cx="10405872" cy="457200"/>
-          </a:xfrm>
-          <a:prstGeom prst="rect">
-            <a:avLst/>
-          </a:prstGeom>
-          <a:noFill/>
-          <a:ln/>
-        </p:spPr>
-        <p:txBody>
-          <a:bodyPr wrap="square" lIns="0" tIns="0" rIns="0" bIns="0" rtlCol="0" anchor="ctr"/>
-          <a:lstStyle/>
-          <a:p>
-            <a:pPr indent="0" marL="0">
-              <a:buNone/>
-            </a:pPr>
-            <a:r>
-              <a:rPr lang="en-US" sz="1250" dirty="0">
-                <a:solidFill>
-                  <a:srgbClr val="0F172A"/>
-                </a:solidFill>
-                <a:latin typeface="Calibri" pitchFamily="34" charset="0"/>
-                <a:ea typeface="Calibri" pitchFamily="34" charset="-122"/>
-                <a:cs typeface="Calibri" pitchFamily="34" charset="-120"/>
-              </a:rPr>
-              <a:t>A 47-county map splits reports too thin to mean anything. Cross-country rollup always; the regional breakdown only when a country is named.</a:t>
             </a:r>
             <a:endParaRPr lang="en-US" sz="1250" dirty="0"/>
           </a:p>
